--- a/Document_Files/Presentation_Slides_v3.pptx
+++ b/Document_Files/Presentation_Slides_v3.pptx
@@ -122,22 +122,7 @@
   <p:extLst>
     <p:ext uri="{EFAFB233-063F-42B5-8137-9DF3F51BA10A}">
       <p15:sldGuideLst xmlns:p15="http://schemas.microsoft.com/office/powerpoint/2012/main">
-        <p15:guide id="1" orient="horz" pos="572" userDrawn="1">
-          <p15:clr>
-            <a:srgbClr val="A4A3A4"/>
-          </p15:clr>
-        </p15:guide>
-        <p15:guide id="2" pos="438" userDrawn="1">
-          <p15:clr>
-            <a:srgbClr val="A4A3A4"/>
-          </p15:clr>
-        </p15:guide>
-        <p15:guide id="3" orient="horz" pos="709" userDrawn="1">
-          <p15:clr>
-            <a:srgbClr val="A4A3A4"/>
-          </p15:clr>
-        </p15:guide>
-        <p15:guide id="4" orient="horz" pos="96" userDrawn="1">
+        <p15:guide id="1" orient="horz" userDrawn="1">
           <p15:clr>
             <a:srgbClr val="A4A3A4"/>
           </p15:clr>
@@ -230,7 +215,7 @@
           <a:p>
             <a:fld id="{F9094043-31A2-4DE8-BD0D-19AD51635CC7}" type="datetimeFigureOut">
               <a:rPr lang="en-US" smtClean="0"/>
-              <a:t>5/9/2026</a:t>
+              <a:t>5/10/2026</a:t>
             </a:fld>
             <a:endParaRPr lang="en-US"/>
           </a:p>
@@ -2056,7 +2041,7 @@
           <a:p>
             <a:fld id="{6142766A-70DF-4EED-AD06-91C046CCC542}" type="datetime1">
               <a:rPr lang="en-US" smtClean="0"/>
-              <a:t>5/9/2026</a:t>
+              <a:t>5/10/2026</a:t>
             </a:fld>
             <a:endParaRPr lang="en-US"/>
           </a:p>
@@ -2254,7 +2239,7 @@
           <a:p>
             <a:fld id="{677551F4-C417-4178-9C4F-AE395D6DEFF8}" type="datetime1">
               <a:rPr lang="en-US" smtClean="0"/>
-              <a:t>5/9/2026</a:t>
+              <a:t>5/10/2026</a:t>
             </a:fld>
             <a:endParaRPr lang="en-US"/>
           </a:p>
@@ -2462,7 +2447,7 @@
           <a:p>
             <a:fld id="{9045068D-DD41-4230-AE56-63E074B1D952}" type="datetime1">
               <a:rPr lang="en-US" smtClean="0"/>
-              <a:t>5/9/2026</a:t>
+              <a:t>5/10/2026</a:t>
             </a:fld>
             <a:endParaRPr lang="en-US"/>
           </a:p>
@@ -2660,7 +2645,7 @@
           <a:p>
             <a:fld id="{0727FE21-2CD4-4765-8796-2AF547FCD935}" type="datetime1">
               <a:rPr lang="en-US" smtClean="0"/>
-              <a:t>5/9/2026</a:t>
+              <a:t>5/10/2026</a:t>
             </a:fld>
             <a:endParaRPr lang="en-US"/>
           </a:p>
@@ -2935,7 +2920,7 @@
           <a:p>
             <a:fld id="{79BB12C0-F489-429A-AE39-EF60A18F4EB4}" type="datetime1">
               <a:rPr lang="en-US" smtClean="0"/>
-              <a:t>5/9/2026</a:t>
+              <a:t>5/10/2026</a:t>
             </a:fld>
             <a:endParaRPr lang="en-US"/>
           </a:p>
@@ -3200,7 +3185,7 @@
           <a:p>
             <a:fld id="{A491563D-13E1-408D-93AB-67E59C14115F}" type="datetime1">
               <a:rPr lang="en-US" smtClean="0"/>
-              <a:t>5/9/2026</a:t>
+              <a:t>5/10/2026</a:t>
             </a:fld>
             <a:endParaRPr lang="en-US"/>
           </a:p>
@@ -3612,7 +3597,7 @@
           <a:p>
             <a:fld id="{89427240-31ED-4540-8622-12CACEE245EE}" type="datetime1">
               <a:rPr lang="en-US" smtClean="0"/>
-              <a:t>5/9/2026</a:t>
+              <a:t>5/10/2026</a:t>
             </a:fld>
             <a:endParaRPr lang="en-US"/>
           </a:p>
@@ -3753,7 +3738,7 @@
           <a:p>
             <a:fld id="{2B33054F-A5B3-4ED5-9CC9-1E82D6C4F216}" type="datetime1">
               <a:rPr lang="en-US" smtClean="0"/>
-              <a:t>5/9/2026</a:t>
+              <a:t>5/10/2026</a:t>
             </a:fld>
             <a:endParaRPr lang="en-US"/>
           </a:p>
@@ -3866,7 +3851,7 @@
           <a:p>
             <a:fld id="{CCDABC0E-F129-4245-AA2B-27E08B4EDF8B}" type="datetime1">
               <a:rPr lang="en-US" smtClean="0"/>
-              <a:t>5/9/2026</a:t>
+              <a:t>5/10/2026</a:t>
             </a:fld>
             <a:endParaRPr lang="en-US"/>
           </a:p>
@@ -4177,7 +4162,7 @@
           <a:p>
             <a:fld id="{AD18681E-A762-4AB5-A6A0-109C767AE03E}" type="datetime1">
               <a:rPr lang="en-US" smtClean="0"/>
-              <a:t>5/9/2026</a:t>
+              <a:t>5/10/2026</a:t>
             </a:fld>
             <a:endParaRPr lang="en-US"/>
           </a:p>
@@ -4465,7 +4450,7 @@
           <a:p>
             <a:fld id="{A3384EF8-0EC5-414E-B27B-6A9E812407A3}" type="datetime1">
               <a:rPr lang="en-US" smtClean="0"/>
-              <a:t>5/9/2026</a:t>
+              <a:t>5/10/2026</a:t>
             </a:fld>
             <a:endParaRPr lang="en-US"/>
           </a:p>
@@ -4706,7 +4691,7 @@
           <a:p>
             <a:fld id="{1843C63F-9209-4850-A260-94E98C5748EF}" type="datetime1">
               <a:rPr lang="en-US" smtClean="0"/>
-              <a:t>5/9/2026</a:t>
+              <a:t>5/10/2026</a:t>
             </a:fld>
             <a:endParaRPr lang="en-US"/>
           </a:p>
@@ -12603,7 +12588,7 @@
           <p:nvPr>
             <p:extLst>
               <p:ext uri="{D42A27DB-BD31-4B8C-83A1-F6EECF244321}">
-                <p14:modId xmlns:p14="http://schemas.microsoft.com/office/powerpoint/2010/main" val="321888817"/>
+                <p14:modId xmlns:p14="http://schemas.microsoft.com/office/powerpoint/2010/main" val="1635326195"/>
               </p:ext>
             </p:extLst>
           </p:nvPr>
@@ -13160,14 +13145,14 @@
           <p:nvPr>
             <p:extLst>
               <p:ext uri="{D42A27DB-BD31-4B8C-83A1-F6EECF244321}">
-                <p14:modId xmlns:p14="http://schemas.microsoft.com/office/powerpoint/2010/main" val="3118696515"/>
+                <p14:modId xmlns:p14="http://schemas.microsoft.com/office/powerpoint/2010/main" val="1611565179"/>
               </p:ext>
             </p:extLst>
           </p:nvPr>
         </p:nvGraphicFramePr>
         <p:xfrm>
           <a:off x="1674796" y="2705646"/>
-          <a:ext cx="8835989" cy="3650704"/>
+          <a:ext cx="8835989" cy="3749040"/>
         </p:xfrm>
         <a:graphic>
           <a:graphicData uri="http://schemas.openxmlformats.org/drawingml/2006/table">
@@ -13212,7 +13197,7 @@
                   </a:extLst>
                 </a:gridCol>
               </a:tblGrid>
-              <a:tr h="0">
+              <a:tr h="319907">
                 <a:tc>
                   <a:txBody>
                     <a:bodyPr/>
@@ -13503,7 +13488,7 @@
                   </a:ext>
                 </a:extLst>
               </a:tr>
-              <a:tr h="406808">
+              <a:tr h="319907">
                 <a:tc>
                   <a:txBody>
                     <a:bodyPr/>
@@ -13798,7 +13783,7 @@
                   </a:ext>
                 </a:extLst>
               </a:tr>
-              <a:tr h="406808">
+              <a:tr h="319907">
                 <a:tc>
                   <a:txBody>
                     <a:bodyPr/>
@@ -14093,7 +14078,312 @@
                   </a:ext>
                 </a:extLst>
               </a:tr>
-              <a:tr h="406808">
+              <a:tr h="147650">
+                <a:tc>
+                  <a:txBody>
+                    <a:bodyPr/>
+                    <a:lstStyle/>
+                    <a:p>
+                      <a:endParaRPr lang="en-US" sz="600" dirty="0"/>
+                    </a:p>
+                  </a:txBody>
+                  <a:tcPr>
+                    <a:lnL w="12700" cmpd="sng">
+                      <a:noFill/>
+                    </a:lnL>
+                    <a:lnR w="9525" cap="flat" cmpd="sng" algn="ctr">
+                      <a:solidFill>
+                        <a:schemeClr val="bg1"/>
+                      </a:solidFill>
+                      <a:prstDash val="solid"/>
+                      <a:round/>
+                      <a:headEnd type="none" w="med" len="med"/>
+                      <a:tailEnd type="none" w="med" len="med"/>
+                    </a:lnR>
+                    <a:lnT w="9525" cap="flat" cmpd="sng" algn="ctr">
+                      <a:solidFill>
+                        <a:schemeClr val="bg1"/>
+                      </a:solidFill>
+                      <a:prstDash val="solid"/>
+                      <a:round/>
+                      <a:headEnd type="none" w="med" len="med"/>
+                      <a:tailEnd type="none" w="med" len="med"/>
+                    </a:lnT>
+                    <a:lnB w="9525" cap="flat" cmpd="sng" algn="ctr">
+                      <a:solidFill>
+                        <a:schemeClr val="bg1"/>
+                      </a:solidFill>
+                      <a:prstDash val="solid"/>
+                      <a:round/>
+                      <a:headEnd type="none" w="med" len="med"/>
+                      <a:tailEnd type="none" w="med" len="med"/>
+                    </a:lnB>
+                    <a:lnTlToBr w="12700" cmpd="sng">
+                      <a:noFill/>
+                      <a:prstDash val="solid"/>
+                    </a:lnTlToBr>
+                    <a:lnBlToTr w="12700" cmpd="sng">
+                      <a:noFill/>
+                      <a:prstDash val="solid"/>
+                    </a:lnBlToTr>
+                    <a:solidFill>
+                      <a:schemeClr val="bg1">
+                        <a:lumMod val="50000"/>
+                      </a:schemeClr>
+                    </a:solidFill>
+                  </a:tcPr>
+                </a:tc>
+                <a:tc>
+                  <a:txBody>
+                    <a:bodyPr/>
+                    <a:lstStyle/>
+                    <a:p>
+                      <a:pPr algn="ctr"/>
+                      <a:endParaRPr lang="en-US" sz="600" dirty="0"/>
+                    </a:p>
+                  </a:txBody>
+                  <a:tcPr>
+                    <a:lnL w="9525" cap="flat" cmpd="sng" algn="ctr">
+                      <a:solidFill>
+                        <a:schemeClr val="bg1"/>
+                      </a:solidFill>
+                      <a:prstDash val="solid"/>
+                      <a:round/>
+                      <a:headEnd type="none" w="med" len="med"/>
+                      <a:tailEnd type="none" w="med" len="med"/>
+                    </a:lnL>
+                    <a:lnR w="9525" cap="flat" cmpd="sng" algn="ctr">
+                      <a:solidFill>
+                        <a:schemeClr val="bg1"/>
+                      </a:solidFill>
+                      <a:prstDash val="solid"/>
+                      <a:round/>
+                      <a:headEnd type="none" w="med" len="med"/>
+                      <a:tailEnd type="none" w="med" len="med"/>
+                    </a:lnR>
+                    <a:lnT w="9525" cap="flat" cmpd="sng" algn="ctr">
+                      <a:solidFill>
+                        <a:schemeClr val="bg1"/>
+                      </a:solidFill>
+                      <a:prstDash val="solid"/>
+                      <a:round/>
+                      <a:headEnd type="none" w="med" len="med"/>
+                      <a:tailEnd type="none" w="med" len="med"/>
+                    </a:lnT>
+                    <a:lnB w="9525" cap="flat" cmpd="sng" algn="ctr">
+                      <a:solidFill>
+                        <a:schemeClr val="bg1"/>
+                      </a:solidFill>
+                      <a:prstDash val="solid"/>
+                      <a:round/>
+                      <a:headEnd type="none" w="med" len="med"/>
+                      <a:tailEnd type="none" w="med" len="med"/>
+                    </a:lnB>
+                    <a:lnTlToBr w="12700" cmpd="sng">
+                      <a:noFill/>
+                      <a:prstDash val="solid"/>
+                    </a:lnTlToBr>
+                    <a:lnBlToTr w="12700" cmpd="sng">
+                      <a:noFill/>
+                      <a:prstDash val="solid"/>
+                    </a:lnBlToTr>
+                    <a:solidFill>
+                      <a:schemeClr val="bg1">
+                        <a:lumMod val="50000"/>
+                      </a:schemeClr>
+                    </a:solidFill>
+                  </a:tcPr>
+                </a:tc>
+                <a:tc>
+                  <a:txBody>
+                    <a:bodyPr/>
+                    <a:lstStyle/>
+                    <a:p>
+                      <a:pPr algn="ctr"/>
+                      <a:endParaRPr lang="en-US" sz="600" dirty="0"/>
+                    </a:p>
+                  </a:txBody>
+                  <a:tcPr>
+                    <a:lnL w="9525" cap="flat" cmpd="sng" algn="ctr">
+                      <a:solidFill>
+                        <a:schemeClr val="bg1"/>
+                      </a:solidFill>
+                      <a:prstDash val="solid"/>
+                      <a:round/>
+                      <a:headEnd type="none" w="med" len="med"/>
+                      <a:tailEnd type="none" w="med" len="med"/>
+                    </a:lnL>
+                    <a:lnR w="9525" cap="flat" cmpd="sng" algn="ctr">
+                      <a:solidFill>
+                        <a:schemeClr val="bg1"/>
+                      </a:solidFill>
+                      <a:prstDash val="solid"/>
+                      <a:round/>
+                      <a:headEnd type="none" w="med" len="med"/>
+                      <a:tailEnd type="none" w="med" len="med"/>
+                    </a:lnR>
+                    <a:lnT w="9525" cap="flat" cmpd="sng" algn="ctr">
+                      <a:solidFill>
+                        <a:schemeClr val="bg1"/>
+                      </a:solidFill>
+                      <a:prstDash val="solid"/>
+                      <a:round/>
+                      <a:headEnd type="none" w="med" len="med"/>
+                      <a:tailEnd type="none" w="med" len="med"/>
+                    </a:lnT>
+                    <a:lnB w="9525" cap="flat" cmpd="sng" algn="ctr">
+                      <a:solidFill>
+                        <a:schemeClr val="bg1"/>
+                      </a:solidFill>
+                      <a:prstDash val="solid"/>
+                      <a:round/>
+                      <a:headEnd type="none" w="med" len="med"/>
+                      <a:tailEnd type="none" w="med" len="med"/>
+                    </a:lnB>
+                    <a:lnTlToBr w="12700" cmpd="sng">
+                      <a:noFill/>
+                      <a:prstDash val="solid"/>
+                    </a:lnTlToBr>
+                    <a:lnBlToTr w="12700" cmpd="sng">
+                      <a:noFill/>
+                      <a:prstDash val="solid"/>
+                    </a:lnBlToTr>
+                    <a:solidFill>
+                      <a:schemeClr val="bg1">
+                        <a:lumMod val="50000"/>
+                      </a:schemeClr>
+                    </a:solidFill>
+                  </a:tcPr>
+                </a:tc>
+                <a:tc>
+                  <a:txBody>
+                    <a:bodyPr/>
+                    <a:lstStyle/>
+                    <a:p>
+                      <a:pPr algn="ctr"/>
+                      <a:endParaRPr lang="en-US" sz="600" dirty="0"/>
+                    </a:p>
+                  </a:txBody>
+                  <a:tcPr>
+                    <a:lnL w="9525" cap="flat" cmpd="sng" algn="ctr">
+                      <a:solidFill>
+                        <a:schemeClr val="bg1"/>
+                      </a:solidFill>
+                      <a:prstDash val="solid"/>
+                      <a:round/>
+                      <a:headEnd type="none" w="med" len="med"/>
+                      <a:tailEnd type="none" w="med" len="med"/>
+                    </a:lnL>
+                    <a:lnR w="9525" cap="flat" cmpd="sng" algn="ctr">
+                      <a:solidFill>
+                        <a:schemeClr val="bg1"/>
+                      </a:solidFill>
+                      <a:prstDash val="solid"/>
+                      <a:round/>
+                      <a:headEnd type="none" w="med" len="med"/>
+                      <a:tailEnd type="none" w="med" len="med"/>
+                    </a:lnR>
+                    <a:lnT w="9525" cap="flat" cmpd="sng" algn="ctr">
+                      <a:solidFill>
+                        <a:schemeClr val="bg1"/>
+                      </a:solidFill>
+                      <a:prstDash val="solid"/>
+                      <a:round/>
+                      <a:headEnd type="none" w="med" len="med"/>
+                      <a:tailEnd type="none" w="med" len="med"/>
+                    </a:lnT>
+                    <a:lnB w="9525" cap="flat" cmpd="sng" algn="ctr">
+                      <a:solidFill>
+                        <a:schemeClr val="bg1"/>
+                      </a:solidFill>
+                      <a:prstDash val="solid"/>
+                      <a:round/>
+                      <a:headEnd type="none" w="med" len="med"/>
+                      <a:tailEnd type="none" w="med" len="med"/>
+                    </a:lnB>
+                    <a:lnTlToBr w="12700" cmpd="sng">
+                      <a:noFill/>
+                      <a:prstDash val="solid"/>
+                    </a:lnTlToBr>
+                    <a:lnBlToTr w="12700" cmpd="sng">
+                      <a:noFill/>
+                      <a:prstDash val="solid"/>
+                    </a:lnBlToTr>
+                    <a:solidFill>
+                      <a:schemeClr val="bg1">
+                        <a:lumMod val="50000"/>
+                      </a:schemeClr>
+                    </a:solidFill>
+                  </a:tcPr>
+                </a:tc>
+                <a:tc>
+                  <a:txBody>
+                    <a:bodyPr/>
+                    <a:lstStyle/>
+                    <a:p>
+                      <a:pPr algn="ctr"/>
+                      <a:endParaRPr lang="en-US" sz="600" dirty="0"/>
+                    </a:p>
+                  </a:txBody>
+                  <a:tcPr>
+                    <a:lnL w="9525" cap="flat" cmpd="sng" algn="ctr">
+                      <a:solidFill>
+                        <a:schemeClr val="bg1"/>
+                      </a:solidFill>
+                      <a:prstDash val="solid"/>
+                      <a:round/>
+                      <a:headEnd type="none" w="med" len="med"/>
+                      <a:tailEnd type="none" w="med" len="med"/>
+                    </a:lnL>
+                    <a:lnR w="9525" cap="flat" cmpd="sng" algn="ctr">
+                      <a:solidFill>
+                        <a:schemeClr val="bg1"/>
+                      </a:solidFill>
+                      <a:prstDash val="solid"/>
+                      <a:round/>
+                      <a:headEnd type="none" w="med" len="med"/>
+                      <a:tailEnd type="none" w="med" len="med"/>
+                    </a:lnR>
+                    <a:lnT w="9525" cap="flat" cmpd="sng" algn="ctr">
+                      <a:solidFill>
+                        <a:schemeClr val="bg1"/>
+                      </a:solidFill>
+                      <a:prstDash val="solid"/>
+                      <a:round/>
+                      <a:headEnd type="none" w="med" len="med"/>
+                      <a:tailEnd type="none" w="med" len="med"/>
+                    </a:lnT>
+                    <a:lnB w="9525" cap="flat" cmpd="sng" algn="ctr">
+                      <a:solidFill>
+                        <a:schemeClr val="bg1"/>
+                      </a:solidFill>
+                      <a:prstDash val="solid"/>
+                      <a:round/>
+                      <a:headEnd type="none" w="med" len="med"/>
+                      <a:tailEnd type="none" w="med" len="med"/>
+                    </a:lnB>
+                    <a:lnTlToBr w="12700" cmpd="sng">
+                      <a:noFill/>
+                      <a:prstDash val="solid"/>
+                    </a:lnTlToBr>
+                    <a:lnBlToTr w="12700" cmpd="sng">
+                      <a:noFill/>
+                      <a:prstDash val="solid"/>
+                    </a:lnBlToTr>
+                    <a:solidFill>
+                      <a:schemeClr val="bg1">
+                        <a:lumMod val="50000"/>
+                      </a:schemeClr>
+                    </a:solidFill>
+                  </a:tcPr>
+                </a:tc>
+                <a:extLst>
+                  <a:ext uri="{0D108BD9-81ED-4DB2-BD59-A6C34878D82A}">
+                    <a16:rowId xmlns:a16="http://schemas.microsoft.com/office/drawing/2014/main" val="3910999465"/>
+                  </a:ext>
+                </a:extLst>
+              </a:tr>
+              <a:tr h="319907">
                 <a:tc>
                   <a:txBody>
                     <a:bodyPr/>
@@ -14388,7 +14678,7 @@
                   </a:ext>
                 </a:extLst>
               </a:tr>
-              <a:tr h="406808">
+              <a:tr h="319907">
                 <a:tc>
                   <a:txBody>
                     <a:bodyPr/>
@@ -14683,7 +14973,7 @@
                   </a:ext>
                 </a:extLst>
               </a:tr>
-              <a:tr h="406808">
+              <a:tr h="319907">
                 <a:tc>
                   <a:txBody>
                     <a:bodyPr/>
@@ -14978,7 +15268,7 @@
                   </a:ext>
                 </a:extLst>
               </a:tr>
-              <a:tr h="406808">
+              <a:tr h="319907">
                 <a:tc>
                   <a:txBody>
                     <a:bodyPr/>
@@ -15273,7 +15563,7 @@
                   </a:ext>
                 </a:extLst>
               </a:tr>
-              <a:tr h="406808">
+              <a:tr h="319907">
                 <a:tc>
                   <a:txBody>
                     <a:bodyPr/>
@@ -15568,7 +15858,7 @@
                   </a:ext>
                 </a:extLst>
               </a:tr>
-              <a:tr h="406808">
+              <a:tr h="319907">
                 <a:tc>
                   <a:txBody>
                     <a:bodyPr/>
@@ -15613,6 +15903,9 @@
                       <a:noFill/>
                       <a:prstDash val="solid"/>
                     </a:lnBlToTr>
+                    <a:solidFill>
+                      <a:srgbClr val="FFFFCC"/>
+                    </a:solidFill>
                   </a:tcPr>
                 </a:tc>
                 <a:tc>
@@ -15666,6 +15959,9 @@
                       <a:noFill/>
                       <a:prstDash val="solid"/>
                     </a:lnBlToTr>
+                    <a:solidFill>
+                      <a:srgbClr val="FFFFCC"/>
+                    </a:solidFill>
                   </a:tcPr>
                 </a:tc>
                 <a:tc>
@@ -15719,6 +16015,9 @@
                       <a:noFill/>
                       <a:prstDash val="solid"/>
                     </a:lnBlToTr>
+                    <a:solidFill>
+                      <a:srgbClr val="FFFFCC"/>
+                    </a:solidFill>
                   </a:tcPr>
                 </a:tc>
                 <a:tc>
@@ -15772,6 +16071,9 @@
                       <a:noFill/>
                       <a:prstDash val="solid"/>
                     </a:lnBlToTr>
+                    <a:solidFill>
+                      <a:srgbClr val="FFFFCC"/>
+                    </a:solidFill>
                   </a:tcPr>
                 </a:tc>
                 <a:tc>
@@ -15825,6 +16127,9 @@
                       <a:noFill/>
                       <a:prstDash val="solid"/>
                     </a:lnBlToTr>
+                    <a:solidFill>
+                      <a:srgbClr val="FFFFCC"/>
+                    </a:solidFill>
                   </a:tcPr>
                 </a:tc>
                 <a:extLst>
@@ -17943,7 +18248,7 @@
           <p:nvPr>
             <p:extLst>
               <p:ext uri="{D42A27DB-BD31-4B8C-83A1-F6EECF244321}">
-                <p14:modId xmlns:p14="http://schemas.microsoft.com/office/powerpoint/2010/main" val="3432233822"/>
+                <p14:modId xmlns:p14="http://schemas.microsoft.com/office/powerpoint/2010/main" val="2676848882"/>
               </p:ext>
             </p:extLst>
           </p:nvPr>
@@ -17992,6 +18297,32 @@
                     </a:p>
                   </a:txBody>
                   <a:tcPr>
+                    <a:lnL w="12700" cmpd="sng">
+                      <a:noFill/>
+                    </a:lnL>
+                    <a:lnR w="12700" cmpd="sng">
+                      <a:noFill/>
+                    </a:lnR>
+                    <a:lnT w="12700" cmpd="sng">
+                      <a:noFill/>
+                    </a:lnT>
+                    <a:lnB w="9525" cap="flat" cmpd="sng" algn="ctr">
+                      <a:solidFill>
+                        <a:schemeClr val="bg1"/>
+                      </a:solidFill>
+                      <a:prstDash val="solid"/>
+                      <a:round/>
+                      <a:headEnd type="none" w="med" len="med"/>
+                      <a:tailEnd type="none" w="med" len="med"/>
+                    </a:lnB>
+                    <a:lnTlToBr w="12700" cmpd="sng">
+                      <a:noFill/>
+                      <a:prstDash val="solid"/>
+                    </a:lnTlToBr>
+                    <a:lnBlToTr w="12700" cmpd="sng">
+                      <a:noFill/>
+                      <a:prstDash val="solid"/>
+                    </a:lnBlToTr>
                     <a:solidFill>
                       <a:schemeClr val="accent1">
                         <a:lumMod val="75000"/>
@@ -18027,7 +18358,46 @@
                       </a:r>
                     </a:p>
                   </a:txBody>
-                  <a:tcPr/>
+                  <a:tcPr>
+                    <a:lnL w="12700" cmpd="sng">
+                      <a:noFill/>
+                    </a:lnL>
+                    <a:lnR w="9525" cap="flat" cmpd="sng" algn="ctr">
+                      <a:solidFill>
+                        <a:schemeClr val="bg1"/>
+                      </a:solidFill>
+                      <a:prstDash val="solid"/>
+                      <a:round/>
+                      <a:headEnd type="none" w="med" len="med"/>
+                      <a:tailEnd type="none" w="med" len="med"/>
+                    </a:lnR>
+                    <a:lnT w="9525" cap="flat" cmpd="sng" algn="ctr">
+                      <a:solidFill>
+                        <a:schemeClr val="bg1"/>
+                      </a:solidFill>
+                      <a:prstDash val="solid"/>
+                      <a:round/>
+                      <a:headEnd type="none" w="med" len="med"/>
+                      <a:tailEnd type="none" w="med" len="med"/>
+                    </a:lnT>
+                    <a:lnB w="9525" cap="flat" cmpd="sng" algn="ctr">
+                      <a:solidFill>
+                        <a:schemeClr val="bg1"/>
+                      </a:solidFill>
+                      <a:prstDash val="solid"/>
+                      <a:round/>
+                      <a:headEnd type="none" w="med" len="med"/>
+                      <a:tailEnd type="none" w="med" len="med"/>
+                    </a:lnB>
+                    <a:lnTlToBr w="12700" cmpd="sng">
+                      <a:noFill/>
+                      <a:prstDash val="solid"/>
+                    </a:lnTlToBr>
+                    <a:lnBlToTr w="12700" cmpd="sng">
+                      <a:noFill/>
+                      <a:prstDash val="solid"/>
+                    </a:lnBlToTr>
+                  </a:tcPr>
                 </a:tc>
                 <a:tc>
                   <a:txBody>
@@ -18041,7 +18411,46 @@
                       </a:r>
                     </a:p>
                   </a:txBody>
-                  <a:tcPr/>
+                  <a:tcPr>
+                    <a:lnL w="9525" cap="flat" cmpd="sng" algn="ctr">
+                      <a:solidFill>
+                        <a:schemeClr val="bg1"/>
+                      </a:solidFill>
+                      <a:prstDash val="solid"/>
+                      <a:round/>
+                      <a:headEnd type="none" w="med" len="med"/>
+                      <a:tailEnd type="none" w="med" len="med"/>
+                    </a:lnL>
+                    <a:lnR w="12700" cmpd="sng">
+                      <a:noFill/>
+                    </a:lnR>
+                    <a:lnT w="9525" cap="flat" cmpd="sng" algn="ctr">
+                      <a:solidFill>
+                        <a:schemeClr val="bg1"/>
+                      </a:solidFill>
+                      <a:prstDash val="solid"/>
+                      <a:round/>
+                      <a:headEnd type="none" w="med" len="med"/>
+                      <a:tailEnd type="none" w="med" len="med"/>
+                    </a:lnT>
+                    <a:lnB w="9525" cap="flat" cmpd="sng" algn="ctr">
+                      <a:solidFill>
+                        <a:schemeClr val="bg1"/>
+                      </a:solidFill>
+                      <a:prstDash val="solid"/>
+                      <a:round/>
+                      <a:headEnd type="none" w="med" len="med"/>
+                      <a:tailEnd type="none" w="med" len="med"/>
+                    </a:lnB>
+                    <a:lnTlToBr w="12700" cmpd="sng">
+                      <a:noFill/>
+                      <a:prstDash val="solid"/>
+                    </a:lnTlToBr>
+                    <a:lnBlToTr w="12700" cmpd="sng">
+                      <a:noFill/>
+                      <a:prstDash val="solid"/>
+                    </a:lnBlToTr>
+                  </a:tcPr>
                 </a:tc>
                 <a:extLst>
                   <a:ext uri="{0D108BD9-81ED-4DB2-BD59-A6C34878D82A}">
@@ -18061,7 +18470,46 @@
                       </a:r>
                     </a:p>
                   </a:txBody>
-                  <a:tcPr/>
+                  <a:tcPr>
+                    <a:lnL w="12700" cmpd="sng">
+                      <a:noFill/>
+                    </a:lnL>
+                    <a:lnR w="9525" cap="flat" cmpd="sng" algn="ctr">
+                      <a:solidFill>
+                        <a:schemeClr val="bg1"/>
+                      </a:solidFill>
+                      <a:prstDash val="solid"/>
+                      <a:round/>
+                      <a:headEnd type="none" w="med" len="med"/>
+                      <a:tailEnd type="none" w="med" len="med"/>
+                    </a:lnR>
+                    <a:lnT w="9525" cap="flat" cmpd="sng" algn="ctr">
+                      <a:solidFill>
+                        <a:schemeClr val="bg1"/>
+                      </a:solidFill>
+                      <a:prstDash val="solid"/>
+                      <a:round/>
+                      <a:headEnd type="none" w="med" len="med"/>
+                      <a:tailEnd type="none" w="med" len="med"/>
+                    </a:lnT>
+                    <a:lnB w="9525" cap="flat" cmpd="sng" algn="ctr">
+                      <a:solidFill>
+                        <a:schemeClr val="bg1"/>
+                      </a:solidFill>
+                      <a:prstDash val="solid"/>
+                      <a:round/>
+                      <a:headEnd type="none" w="med" len="med"/>
+                      <a:tailEnd type="none" w="med" len="med"/>
+                    </a:lnB>
+                    <a:lnTlToBr w="12700" cmpd="sng">
+                      <a:noFill/>
+                      <a:prstDash val="solid"/>
+                    </a:lnTlToBr>
+                    <a:lnBlToTr w="12700" cmpd="sng">
+                      <a:noFill/>
+                      <a:prstDash val="solid"/>
+                    </a:lnBlToTr>
+                  </a:tcPr>
                 </a:tc>
                 <a:tc>
                   <a:txBody>
@@ -18075,7 +18523,46 @@
                       </a:r>
                     </a:p>
                   </a:txBody>
-                  <a:tcPr/>
+                  <a:tcPr>
+                    <a:lnL w="9525" cap="flat" cmpd="sng" algn="ctr">
+                      <a:solidFill>
+                        <a:schemeClr val="bg1"/>
+                      </a:solidFill>
+                      <a:prstDash val="solid"/>
+                      <a:round/>
+                      <a:headEnd type="none" w="med" len="med"/>
+                      <a:tailEnd type="none" w="med" len="med"/>
+                    </a:lnL>
+                    <a:lnR w="12700" cmpd="sng">
+                      <a:noFill/>
+                    </a:lnR>
+                    <a:lnT w="9525" cap="flat" cmpd="sng" algn="ctr">
+                      <a:solidFill>
+                        <a:schemeClr val="bg1"/>
+                      </a:solidFill>
+                      <a:prstDash val="solid"/>
+                      <a:round/>
+                      <a:headEnd type="none" w="med" len="med"/>
+                      <a:tailEnd type="none" w="med" len="med"/>
+                    </a:lnT>
+                    <a:lnB w="9525" cap="flat" cmpd="sng" algn="ctr">
+                      <a:solidFill>
+                        <a:schemeClr val="bg1"/>
+                      </a:solidFill>
+                      <a:prstDash val="solid"/>
+                      <a:round/>
+                      <a:headEnd type="none" w="med" len="med"/>
+                      <a:tailEnd type="none" w="med" len="med"/>
+                    </a:lnB>
+                    <a:lnTlToBr w="12700" cmpd="sng">
+                      <a:noFill/>
+                      <a:prstDash val="solid"/>
+                    </a:lnTlToBr>
+                    <a:lnBlToTr w="12700" cmpd="sng">
+                      <a:noFill/>
+                      <a:prstDash val="solid"/>
+                    </a:lnBlToTr>
+                  </a:tcPr>
                 </a:tc>
                 <a:extLst>
                   <a:ext uri="{0D108BD9-81ED-4DB2-BD59-A6C34878D82A}">
@@ -18095,7 +18582,40 @@
                       </a:r>
                     </a:p>
                   </a:txBody>
-                  <a:tcPr/>
+                  <a:tcPr>
+                    <a:lnL w="12700" cmpd="sng">
+                      <a:noFill/>
+                    </a:lnL>
+                    <a:lnR w="9525" cap="flat" cmpd="sng" algn="ctr">
+                      <a:solidFill>
+                        <a:schemeClr val="bg1"/>
+                      </a:solidFill>
+                      <a:prstDash val="solid"/>
+                      <a:round/>
+                      <a:headEnd type="none" w="med" len="med"/>
+                      <a:tailEnd type="none" w="med" len="med"/>
+                    </a:lnR>
+                    <a:lnT w="9525" cap="flat" cmpd="sng" algn="ctr">
+                      <a:solidFill>
+                        <a:schemeClr val="bg1"/>
+                      </a:solidFill>
+                      <a:prstDash val="solid"/>
+                      <a:round/>
+                      <a:headEnd type="none" w="med" len="med"/>
+                      <a:tailEnd type="none" w="med" len="med"/>
+                    </a:lnT>
+                    <a:lnB w="12700" cmpd="sng">
+                      <a:noFill/>
+                    </a:lnB>
+                    <a:lnTlToBr w="12700" cmpd="sng">
+                      <a:noFill/>
+                      <a:prstDash val="solid"/>
+                    </a:lnTlToBr>
+                    <a:lnBlToTr w="12700" cmpd="sng">
+                      <a:noFill/>
+                      <a:prstDash val="solid"/>
+                    </a:lnBlToTr>
+                  </a:tcPr>
                 </a:tc>
                 <a:tc>
                   <a:txBody>
@@ -18109,7 +18629,40 @@
                       </a:r>
                     </a:p>
                   </a:txBody>
-                  <a:tcPr/>
+                  <a:tcPr>
+                    <a:lnL w="9525" cap="flat" cmpd="sng" algn="ctr">
+                      <a:solidFill>
+                        <a:schemeClr val="bg1"/>
+                      </a:solidFill>
+                      <a:prstDash val="solid"/>
+                      <a:round/>
+                      <a:headEnd type="none" w="med" len="med"/>
+                      <a:tailEnd type="none" w="med" len="med"/>
+                    </a:lnL>
+                    <a:lnR w="12700" cmpd="sng">
+                      <a:noFill/>
+                    </a:lnR>
+                    <a:lnT w="9525" cap="flat" cmpd="sng" algn="ctr">
+                      <a:solidFill>
+                        <a:schemeClr val="bg1"/>
+                      </a:solidFill>
+                      <a:prstDash val="solid"/>
+                      <a:round/>
+                      <a:headEnd type="none" w="med" len="med"/>
+                      <a:tailEnd type="none" w="med" len="med"/>
+                    </a:lnT>
+                    <a:lnB w="12700" cmpd="sng">
+                      <a:noFill/>
+                    </a:lnB>
+                    <a:lnTlToBr w="12700" cmpd="sng">
+                      <a:noFill/>
+                      <a:prstDash val="solid"/>
+                    </a:lnTlToBr>
+                    <a:lnBlToTr w="12700" cmpd="sng">
+                      <a:noFill/>
+                      <a:prstDash val="solid"/>
+                    </a:lnBlToTr>
+                  </a:tcPr>
                 </a:tc>
                 <a:extLst>
                   <a:ext uri="{0D108BD9-81ED-4DB2-BD59-A6C34878D82A}">
@@ -18248,7 +18801,7 @@
           <a:p>
             <a:r>
               <a:rPr lang="en-US" sz="2000" dirty="0"/>
-              <a:t>Asian/PI subgroup interaction term is significant but high HR = 15.514 and large CI bounds suggest this is an unstable result</a:t>
+              <a:t>Only Asian/PI subgroup interaction term is significant but high HR = 15.514 and large CI bounds suggest this is an unstable result</a:t>
             </a:r>
           </a:p>
           <a:p>

--- a/Document_Files/Presentation_Slides_v3.pptx
+++ b/Document_Files/Presentation_Slides_v3.pptx
@@ -123,6 +123,11 @@
     <p:ext uri="{EFAFB233-063F-42B5-8137-9DF3F51BA10A}">
       <p15:sldGuideLst xmlns:p15="http://schemas.microsoft.com/office/powerpoint/2012/main">
         <p15:guide id="1" orient="horz" userDrawn="1">
+          <p15:clr>
+            <a:srgbClr val="A4A3A4"/>
+          </p15:clr>
+        </p15:guide>
+        <p15:guide id="2" pos="3840">
           <p15:clr>
             <a:srgbClr val="A4A3A4"/>
           </p15:clr>
@@ -5450,60 +5455,6 @@
           </a:fontRef>
         </p:style>
       </p:cxnSp>
-      <p:sp>
-        <p:nvSpPr>
-          <p:cNvPr id="7" name="Slide Number Placeholder 6">
-            <a:extLst>
-              <a:ext uri="{FF2B5EF4-FFF2-40B4-BE49-F238E27FC236}">
-                <a16:creationId xmlns:a16="http://schemas.microsoft.com/office/drawing/2014/main" id="{1354391C-AAAC-70C5-37BD-D5C6EB8F3FA5}"/>
-              </a:ext>
-            </a:extLst>
-          </p:cNvPr>
-          <p:cNvSpPr>
-            <a:spLocks noGrp="1"/>
-          </p:cNvSpPr>
-          <p:nvPr>
-            <p:ph type="sldNum" sz="quarter" idx="12"/>
-          </p:nvPr>
-        </p:nvSpPr>
-        <p:spPr>
-          <a:xfrm>
-            <a:off x="8610600" y="6356350"/>
-            <a:ext cx="2743200" cy="365125"/>
-          </a:xfrm>
-        </p:spPr>
-        <p:txBody>
-          <a:bodyPr>
-            <a:normAutofit/>
-          </a:bodyPr>
-          <a:lstStyle/>
-          <a:p>
-            <a:pPr>
-              <a:spcAft>
-                <a:spcPts val="600"/>
-              </a:spcAft>
-            </a:pPr>
-            <a:fld id="{EE78427E-3D83-4E05-BBD0-5A5577BF92C2}" type="slidenum">
-              <a:rPr lang="en-US">
-                <a:solidFill>
-                  <a:srgbClr val="FFFFFF"/>
-                </a:solidFill>
-              </a:rPr>
-              <a:pPr>
-                <a:spcAft>
-                  <a:spcPts val="600"/>
-                </a:spcAft>
-              </a:pPr>
-              <a:t>1</a:t>
-            </a:fld>
-            <a:endParaRPr lang="en-US">
-              <a:solidFill>
-                <a:srgbClr val="FFFFFF"/>
-              </a:solidFill>
-            </a:endParaRPr>
-          </a:p>
-        </p:txBody>
-      </p:sp>
     </p:spTree>
     <p:extLst>
       <p:ext uri="{BB962C8B-B14F-4D97-AF65-F5344CB8AC3E}">
@@ -8815,6 +8766,40 @@
           </a:graphicData>
         </a:graphic>
       </p:graphicFrame>
+      <p:sp>
+        <p:nvSpPr>
+          <p:cNvPr id="4" name="Slide Number Placeholder 5">
+            <a:extLst>
+              <a:ext uri="{FF2B5EF4-FFF2-40B4-BE49-F238E27FC236}">
+                <a16:creationId xmlns:a16="http://schemas.microsoft.com/office/drawing/2014/main" id="{ECB1F166-0C83-C451-F483-174AE071A220}"/>
+              </a:ext>
+            </a:extLst>
+          </p:cNvPr>
+          <p:cNvSpPr>
+            <a:spLocks noGrp="1"/>
+          </p:cNvSpPr>
+          <p:nvPr>
+            <p:ph type="sldNum" sz="quarter" idx="12"/>
+          </p:nvPr>
+        </p:nvSpPr>
+        <p:spPr>
+          <a:xfrm>
+            <a:off x="8610600" y="6409390"/>
+            <a:ext cx="2743200" cy="365125"/>
+          </a:xfrm>
+        </p:spPr>
+        <p:txBody>
+          <a:bodyPr/>
+          <a:lstStyle/>
+          <a:p>
+            <a:fld id="{EE78427E-3D83-4E05-BBD0-5A5577BF92C2}" type="slidenum">
+              <a:rPr lang="en-US" smtClean="0"/>
+              <a:t>10</a:t>
+            </a:fld>
+            <a:endParaRPr lang="en-US" dirty="0"/>
+          </a:p>
+        </p:txBody>
+      </p:sp>
     </p:spTree>
     <p:extLst>
       <p:ext uri="{BB962C8B-B14F-4D97-AF65-F5344CB8AC3E}">
@@ -12298,8 +12283,8 @@
         </p:nvSpPr>
         <p:spPr>
           <a:xfrm>
-            <a:off x="695325" y="1125538"/>
-            <a:ext cx="5105502" cy="5452719"/>
+            <a:off x="695325" y="1125539"/>
+            <a:ext cx="5105502" cy="5253372"/>
           </a:xfrm>
           <a:solidFill>
             <a:schemeClr val="tx2">
@@ -12310,7 +12295,7 @@
         </p:spPr>
         <p:txBody>
           <a:bodyPr>
-            <a:normAutofit/>
+            <a:noAutofit/>
           </a:bodyPr>
           <a:lstStyle/>
           <a:p>
@@ -12318,57 +12303,57 @@
               <a:buNone/>
             </a:pPr>
             <a:r>
-              <a:rPr lang="en-US" sz="2400" b="1" dirty="0"/>
+              <a:rPr lang="en-US" sz="2200" b="1" dirty="0"/>
               <a:t>Structure</a:t>
             </a:r>
           </a:p>
           <a:p>
             <a:r>
-              <a:rPr lang="en-US" sz="2400" dirty="0"/>
+              <a:rPr lang="en-US" sz="2200" dirty="0"/>
               <a:t>Multi-center, randomized, double-blind, placebo-controlled trial</a:t>
             </a:r>
           </a:p>
           <a:p>
             <a:r>
-              <a:rPr lang="en-US" sz="2400" dirty="0"/>
+              <a:rPr lang="en-US" sz="2200" dirty="0"/>
               <a:t>1,151 adults with advanced HIV (CD4 ≤ 200 cells/mm³)</a:t>
             </a:r>
           </a:p>
           <a:p>
             <a:r>
-              <a:rPr lang="en-US" sz="2400" dirty="0"/>
+              <a:rPr lang="en-US" sz="2200" dirty="0"/>
               <a:t>Participants randomized within two CD4 count blocks</a:t>
             </a:r>
           </a:p>
           <a:p>
-            <a:endParaRPr lang="en-US" sz="2400" dirty="0"/>
+            <a:endParaRPr lang="en-US" sz="2200" dirty="0"/>
           </a:p>
           <a:p>
             <a:pPr marL="0" indent="0">
               <a:buNone/>
             </a:pPr>
             <a:r>
-              <a:rPr lang="en-US" sz="2400" b="1" dirty="0"/>
+              <a:rPr lang="en-US" sz="2200" b="1" dirty="0"/>
               <a:t>Treatment Groups</a:t>
             </a:r>
           </a:p>
           <a:p>
             <a:r>
-              <a:rPr lang="en-US" sz="2400" b="1" dirty="0"/>
+              <a:rPr lang="en-US" sz="2200" b="1" dirty="0"/>
               <a:t>Control: </a:t>
             </a:r>
             <a:r>
-              <a:rPr lang="en-US" sz="2400" dirty="0"/>
+              <a:rPr lang="en-US" sz="2200" dirty="0"/>
               <a:t>standard two-drug regimen</a:t>
             </a:r>
           </a:p>
           <a:p>
             <a:r>
-              <a:rPr lang="en-US" sz="2400" b="1" dirty="0"/>
+              <a:rPr lang="en-US" sz="2200" b="1" dirty="0"/>
               <a:t>Treatment: </a:t>
             </a:r>
             <a:r>
-              <a:rPr lang="en-US" sz="2400" dirty="0"/>
+              <a:rPr lang="en-US" sz="2200" dirty="0"/>
               <a:t>same regimen + protease inhibitor indinavir</a:t>
             </a:r>
           </a:p>
@@ -12388,8 +12373,8 @@
         </p:nvSpPr>
         <p:spPr>
           <a:xfrm>
-            <a:off x="6275672" y="1125538"/>
-            <a:ext cx="5508825" cy="5424461"/>
+            <a:off x="6286884" y="1125538"/>
+            <a:ext cx="5508825" cy="5253371"/>
           </a:xfrm>
           <a:prstGeom prst="rect">
             <a:avLst/>
@@ -12408,7 +12393,7 @@
           <a:lstStyle/>
           <a:p>
             <a:r>
-              <a:rPr lang="en-US" sz="2400" b="1" dirty="0"/>
+              <a:rPr lang="en-US" sz="2200" b="1" dirty="0"/>
               <a:t>Primary Outcome</a:t>
             </a:r>
           </a:p>
@@ -12418,16 +12403,16 @@
               <a:buChar char="•"/>
             </a:pPr>
             <a:r>
-              <a:rPr lang="en-US" sz="2400" dirty="0"/>
+              <a:rPr lang="en-US" sz="2200" dirty="0"/>
               <a:t>Days to AIDS-defining illness or death (time-to-event)</a:t>
             </a:r>
           </a:p>
           <a:p>
-            <a:endParaRPr lang="en-US" sz="2400" dirty="0"/>
-          </a:p>
-          <a:p>
-            <a:r>
-              <a:rPr lang="en-US" sz="2400" b="1" dirty="0"/>
+            <a:endParaRPr lang="en-US" sz="2200" dirty="0"/>
+          </a:p>
+          <a:p>
+            <a:r>
+              <a:rPr lang="en-US" sz="2200" b="1" dirty="0"/>
               <a:t>Subgroups Analyzed</a:t>
             </a:r>
           </a:p>
@@ -12437,11 +12422,11 @@
               <a:buChar char="•"/>
             </a:pPr>
             <a:r>
-              <a:rPr lang="en-US" sz="2400" b="1" dirty="0"/>
+              <a:rPr lang="en-US" sz="2200" b="1" dirty="0"/>
               <a:t>Sex: </a:t>
             </a:r>
             <a:r>
-              <a:rPr lang="en-US" sz="2400" dirty="0"/>
+              <a:rPr lang="en-US" sz="2200" dirty="0"/>
               <a:t>Female (83%), Male (17%)</a:t>
             </a:r>
           </a:p>
@@ -12451,20 +12436,20 @@
               <a:buChar char="•"/>
             </a:pPr>
             <a:r>
-              <a:rPr lang="en-US" sz="2400" b="1" dirty="0"/>
+              <a:rPr lang="en-US" sz="2200" b="1" dirty="0"/>
               <a:t>Race/Ethnicity: </a:t>
             </a:r>
             <a:r>
-              <a:rPr lang="en-US" sz="2400" dirty="0"/>
+              <a:rPr lang="en-US" sz="2200" dirty="0"/>
               <a:t>White (52%), Black (28%), Hispanic (18%), Asian/PI (1%), Other (1%)</a:t>
             </a:r>
           </a:p>
           <a:p>
-            <a:endParaRPr lang="en-US" sz="2400" dirty="0"/>
-          </a:p>
-          <a:p>
-            <a:r>
-              <a:rPr lang="en-US" sz="2400" b="1" dirty="0"/>
+            <a:endParaRPr lang="en-US" sz="2200" dirty="0"/>
+          </a:p>
+          <a:p>
+            <a:r>
+              <a:rPr lang="en-US" sz="2200" b="1" dirty="0"/>
               <a:t>Other Covariates</a:t>
             </a:r>
           </a:p>
@@ -12474,9 +12459,43 @@
               <a:buChar char="•"/>
             </a:pPr>
             <a:r>
-              <a:rPr lang="en-US" sz="2400" dirty="0"/>
+              <a:rPr lang="en-US" sz="2200" dirty="0"/>
               <a:t>Age, baseline CD4 count, Karnofsky score, prior ZDV use, CD4 stratum</a:t>
             </a:r>
+          </a:p>
+        </p:txBody>
+      </p:sp>
+      <p:sp>
+        <p:nvSpPr>
+          <p:cNvPr id="3" name="Slide Number Placeholder 5">
+            <a:extLst>
+              <a:ext uri="{FF2B5EF4-FFF2-40B4-BE49-F238E27FC236}">
+                <a16:creationId xmlns:a16="http://schemas.microsoft.com/office/drawing/2014/main" id="{70AAECE4-64AA-4160-7891-136D670BA0F5}"/>
+              </a:ext>
+            </a:extLst>
+          </p:cNvPr>
+          <p:cNvSpPr>
+            <a:spLocks noGrp="1"/>
+          </p:cNvSpPr>
+          <p:nvPr>
+            <p:ph type="sldNum" sz="quarter" idx="12"/>
+          </p:nvPr>
+        </p:nvSpPr>
+        <p:spPr>
+          <a:xfrm>
+            <a:off x="8610600" y="6378910"/>
+            <a:ext cx="2743200" cy="365125"/>
+          </a:xfrm>
+        </p:spPr>
+        <p:txBody>
+          <a:bodyPr/>
+          <a:lstStyle/>
+          <a:p>
+            <a:fld id="{EE78427E-3D83-4E05-BBD0-5A5577BF92C2}" type="slidenum">
+              <a:rPr lang="en-US" smtClean="0"/>
+              <a:t>4</a:t>
+            </a:fld>
+            <a:endParaRPr lang="en-US" dirty="0"/>
           </a:p>
         </p:txBody>
       </p:sp>
@@ -16888,6 +16907,138 @@
           </a:prstGeom>
         </p:spPr>
       </p:pic>
+      <p:sp>
+        <p:nvSpPr>
+          <p:cNvPr id="3" name="Slide Number Placeholder 5">
+            <a:extLst>
+              <a:ext uri="{FF2B5EF4-FFF2-40B4-BE49-F238E27FC236}">
+                <a16:creationId xmlns:a16="http://schemas.microsoft.com/office/drawing/2014/main" id="{F438BAF0-98CF-24BB-C2FC-6DCF8755384B}"/>
+              </a:ext>
+            </a:extLst>
+          </p:cNvPr>
+          <p:cNvSpPr txBox="1">
+            <a:spLocks/>
+          </p:cNvSpPr>
+          <p:nvPr/>
+        </p:nvSpPr>
+        <p:spPr>
+          <a:xfrm>
+            <a:off x="8610600" y="6378910"/>
+            <a:ext cx="2743200" cy="365125"/>
+          </a:xfrm>
+          <a:prstGeom prst="rect">
+            <a:avLst/>
+          </a:prstGeom>
+        </p:spPr>
+        <p:txBody>
+          <a:bodyPr vert="horz" lIns="91440" tIns="45720" rIns="91440" bIns="45720" rtlCol="0" anchor="ctr"/>
+          <a:lstStyle>
+            <a:defPPr>
+              <a:defRPr lang="en-US"/>
+            </a:defPPr>
+            <a:lvl1pPr marL="0" algn="r" defTabSz="914400" rtl="0" eaLnBrk="1" latinLnBrk="0" hangingPunct="1">
+              <a:defRPr sz="1200" kern="1200">
+                <a:solidFill>
+                  <a:schemeClr val="tx1">
+                    <a:tint val="82000"/>
+                  </a:schemeClr>
+                </a:solidFill>
+                <a:latin typeface="+mn-lt"/>
+                <a:ea typeface="+mn-ea"/>
+                <a:cs typeface="+mn-cs"/>
+              </a:defRPr>
+            </a:lvl1pPr>
+            <a:lvl2pPr marL="457200" algn="l" defTabSz="914400" rtl="0" eaLnBrk="1" latinLnBrk="0" hangingPunct="1">
+              <a:defRPr sz="1800" kern="1200">
+                <a:solidFill>
+                  <a:schemeClr val="tx1"/>
+                </a:solidFill>
+                <a:latin typeface="+mn-lt"/>
+                <a:ea typeface="+mn-ea"/>
+                <a:cs typeface="+mn-cs"/>
+              </a:defRPr>
+            </a:lvl2pPr>
+            <a:lvl3pPr marL="914400" algn="l" defTabSz="914400" rtl="0" eaLnBrk="1" latinLnBrk="0" hangingPunct="1">
+              <a:defRPr sz="1800" kern="1200">
+                <a:solidFill>
+                  <a:schemeClr val="tx1"/>
+                </a:solidFill>
+                <a:latin typeface="+mn-lt"/>
+                <a:ea typeface="+mn-ea"/>
+                <a:cs typeface="+mn-cs"/>
+              </a:defRPr>
+            </a:lvl3pPr>
+            <a:lvl4pPr marL="1371600" algn="l" defTabSz="914400" rtl="0" eaLnBrk="1" latinLnBrk="0" hangingPunct="1">
+              <a:defRPr sz="1800" kern="1200">
+                <a:solidFill>
+                  <a:schemeClr val="tx1"/>
+                </a:solidFill>
+                <a:latin typeface="+mn-lt"/>
+                <a:ea typeface="+mn-ea"/>
+                <a:cs typeface="+mn-cs"/>
+              </a:defRPr>
+            </a:lvl4pPr>
+            <a:lvl5pPr marL="1828800" algn="l" defTabSz="914400" rtl="0" eaLnBrk="1" latinLnBrk="0" hangingPunct="1">
+              <a:defRPr sz="1800" kern="1200">
+                <a:solidFill>
+                  <a:schemeClr val="tx1"/>
+                </a:solidFill>
+                <a:latin typeface="+mn-lt"/>
+                <a:ea typeface="+mn-ea"/>
+                <a:cs typeface="+mn-cs"/>
+              </a:defRPr>
+            </a:lvl5pPr>
+            <a:lvl6pPr marL="2286000" algn="l" defTabSz="914400" rtl="0" eaLnBrk="1" latinLnBrk="0" hangingPunct="1">
+              <a:defRPr sz="1800" kern="1200">
+                <a:solidFill>
+                  <a:schemeClr val="tx1"/>
+                </a:solidFill>
+                <a:latin typeface="+mn-lt"/>
+                <a:ea typeface="+mn-ea"/>
+                <a:cs typeface="+mn-cs"/>
+              </a:defRPr>
+            </a:lvl6pPr>
+            <a:lvl7pPr marL="2743200" algn="l" defTabSz="914400" rtl="0" eaLnBrk="1" latinLnBrk="0" hangingPunct="1">
+              <a:defRPr sz="1800" kern="1200">
+                <a:solidFill>
+                  <a:schemeClr val="tx1"/>
+                </a:solidFill>
+                <a:latin typeface="+mn-lt"/>
+                <a:ea typeface="+mn-ea"/>
+                <a:cs typeface="+mn-cs"/>
+              </a:defRPr>
+            </a:lvl7pPr>
+            <a:lvl8pPr marL="3200400" algn="l" defTabSz="914400" rtl="0" eaLnBrk="1" latinLnBrk="0" hangingPunct="1">
+              <a:defRPr sz="1800" kern="1200">
+                <a:solidFill>
+                  <a:schemeClr val="tx1"/>
+                </a:solidFill>
+                <a:latin typeface="+mn-lt"/>
+                <a:ea typeface="+mn-ea"/>
+                <a:cs typeface="+mn-cs"/>
+              </a:defRPr>
+            </a:lvl8pPr>
+            <a:lvl9pPr marL="3657600" algn="l" defTabSz="914400" rtl="0" eaLnBrk="1" latinLnBrk="0" hangingPunct="1">
+              <a:defRPr sz="1800" kern="1200">
+                <a:solidFill>
+                  <a:schemeClr val="tx1"/>
+                </a:solidFill>
+                <a:latin typeface="+mn-lt"/>
+                <a:ea typeface="+mn-ea"/>
+                <a:cs typeface="+mn-cs"/>
+              </a:defRPr>
+            </a:lvl9pPr>
+          </a:lstStyle>
+          <a:p>
+            <a:fld id="{EE78427E-3D83-4E05-BBD0-5A5577BF92C2}" type="slidenum">
+              <a:rPr lang="en-US" smtClean="0"/>
+              <a:pPr/>
+              <a:t>7</a:t>
+            </a:fld>
+            <a:endParaRPr lang="en-US" dirty="0"/>
+          </a:p>
+        </p:txBody>
+      </p:sp>
     </p:spTree>
     <p:extLst>
       <p:ext uri="{BB962C8B-B14F-4D97-AF65-F5344CB8AC3E}">
@@ -17518,40 +17669,6 @@
           </p:sp>
         </mc:Fallback>
       </mc:AlternateContent>
-      <p:sp>
-        <p:nvSpPr>
-          <p:cNvPr id="6" name="Slide Number Placeholder 5">
-            <a:extLst>
-              <a:ext uri="{FF2B5EF4-FFF2-40B4-BE49-F238E27FC236}">
-                <a16:creationId xmlns:a16="http://schemas.microsoft.com/office/drawing/2014/main" id="{2EC84A45-C245-A4B2-A76C-F14D7232F9F9}"/>
-              </a:ext>
-            </a:extLst>
-          </p:cNvPr>
-          <p:cNvSpPr>
-            <a:spLocks noGrp="1"/>
-          </p:cNvSpPr>
-          <p:nvPr>
-            <p:ph type="sldNum" sz="quarter" idx="12"/>
-          </p:nvPr>
-        </p:nvSpPr>
-        <p:spPr>
-          <a:xfrm>
-            <a:off x="8610600" y="6500830"/>
-            <a:ext cx="2743200" cy="365125"/>
-          </a:xfrm>
-        </p:spPr>
-        <p:txBody>
-          <a:bodyPr/>
-          <a:lstStyle/>
-          <a:p>
-            <a:fld id="{EE78427E-3D83-4E05-BBD0-5A5577BF92C2}" type="slidenum">
-              <a:rPr lang="en-US" smtClean="0"/>
-              <a:t>8</a:t>
-            </a:fld>
-            <a:endParaRPr lang="en-US"/>
-          </a:p>
-        </p:txBody>
-      </p:sp>
       <p:graphicFrame>
         <p:nvGraphicFramePr>
           <p:cNvPr id="3" name="Table 2">
@@ -18674,6 +18791,40 @@
           </a:graphicData>
         </a:graphic>
       </p:graphicFrame>
+      <p:sp>
+        <p:nvSpPr>
+          <p:cNvPr id="9" name="Slide Number Placeholder 5">
+            <a:extLst>
+              <a:ext uri="{FF2B5EF4-FFF2-40B4-BE49-F238E27FC236}">
+                <a16:creationId xmlns:a16="http://schemas.microsoft.com/office/drawing/2014/main" id="{D072764B-DC06-36F8-7197-5FF2CAF5C1CC}"/>
+              </a:ext>
+            </a:extLst>
+          </p:cNvPr>
+          <p:cNvSpPr>
+            <a:spLocks noGrp="1"/>
+          </p:cNvSpPr>
+          <p:nvPr>
+            <p:ph type="sldNum" sz="quarter" idx="12"/>
+          </p:nvPr>
+        </p:nvSpPr>
+        <p:spPr>
+          <a:xfrm>
+            <a:off x="8610600" y="6378910"/>
+            <a:ext cx="2743200" cy="365125"/>
+          </a:xfrm>
+        </p:spPr>
+        <p:txBody>
+          <a:bodyPr/>
+          <a:lstStyle/>
+          <a:p>
+            <a:fld id="{EE78427E-3D83-4E05-BBD0-5A5577BF92C2}" type="slidenum">
+              <a:rPr lang="en-US" smtClean="0"/>
+              <a:t>8</a:t>
+            </a:fld>
+            <a:endParaRPr lang="en-US" dirty="0"/>
+          </a:p>
+        </p:txBody>
+      </p:sp>
     </p:spTree>
     <p:extLst>
       <p:ext uri="{BB962C8B-B14F-4D97-AF65-F5344CB8AC3E}">
@@ -20596,6 +20747,40 @@
           </a:graphicData>
         </a:graphic>
       </p:graphicFrame>
+      <p:sp>
+        <p:nvSpPr>
+          <p:cNvPr id="6" name="Slide Number Placeholder 5">
+            <a:extLst>
+              <a:ext uri="{FF2B5EF4-FFF2-40B4-BE49-F238E27FC236}">
+                <a16:creationId xmlns:a16="http://schemas.microsoft.com/office/drawing/2014/main" id="{18071FD4-7731-0AFB-4EFD-595B31DC42B3}"/>
+              </a:ext>
+            </a:extLst>
+          </p:cNvPr>
+          <p:cNvSpPr>
+            <a:spLocks noGrp="1"/>
+          </p:cNvSpPr>
+          <p:nvPr>
+            <p:ph type="sldNum" sz="quarter" idx="12"/>
+          </p:nvPr>
+        </p:nvSpPr>
+        <p:spPr>
+          <a:xfrm>
+            <a:off x="8610600" y="6378910"/>
+            <a:ext cx="2743200" cy="365125"/>
+          </a:xfrm>
+        </p:spPr>
+        <p:txBody>
+          <a:bodyPr/>
+          <a:lstStyle/>
+          <a:p>
+            <a:fld id="{EE78427E-3D83-4E05-BBD0-5A5577BF92C2}" type="slidenum">
+              <a:rPr lang="en-US" smtClean="0"/>
+              <a:t>9</a:t>
+            </a:fld>
+            <a:endParaRPr lang="en-US" dirty="0"/>
+          </a:p>
+        </p:txBody>
+      </p:sp>
     </p:spTree>
     <p:extLst>
       <p:ext uri="{BB962C8B-B14F-4D97-AF65-F5344CB8AC3E}">

--- a/Document_Files/Presentation_Slides_v3.pptx
+++ b/Document_Files/Presentation_Slides_v3.pptx
@@ -220,7 +220,7 @@
           <a:p>
             <a:fld id="{F9094043-31A2-4DE8-BD0D-19AD51635CC7}" type="datetimeFigureOut">
               <a:rPr lang="en-US" smtClean="0"/>
-              <a:t>5/10/2026</a:t>
+              <a:t>5/11/2026</a:t>
             </a:fld>
             <a:endParaRPr lang="en-US"/>
           </a:p>
@@ -531,10 +531,6 @@
           <a:bodyPr/>
           <a:lstStyle/>
           <a:p>
-            <a:r>
-              <a:rPr lang="en-US"/>
-              <a:t>Represented but Underpowered: Subgroup Inference in the ACTG 320 Trial</a:t>
-            </a:r>
             <a:endParaRPr lang="en-US" dirty="0"/>
           </a:p>
         </p:txBody>
@@ -556,7 +552,7 @@
           <a:p>
             <a:fld id="{99AE9003-360B-4E18-8AA9-F1BCDFEE0A17}" type="slidenum">
               <a:rPr lang="en-US" smtClean="0"/>
-              <a:t>3</a:t>
+              <a:t>1</a:t>
             </a:fld>
             <a:endParaRPr lang="en-US"/>
           </a:p>
@@ -565,7 +561,103 @@
     </p:spTree>
     <p:extLst>
       <p:ext uri="{BB962C8B-B14F-4D97-AF65-F5344CB8AC3E}">
-        <p14:creationId xmlns:p14="http://schemas.microsoft.com/office/powerpoint/2010/main" val="1829331370"/>
+        <p14:creationId xmlns:p14="http://schemas.microsoft.com/office/powerpoint/2010/main" val="2602606031"/>
+      </p:ext>
+    </p:extLst>
+  </p:cSld>
+  <p:clrMapOvr>
+    <a:masterClrMapping/>
+  </p:clrMapOvr>
+</p:notes>
+</file>
+
+<file path=ppt/notesSlides/notesSlide10.xml><?xml version="1.0" encoding="utf-8"?>
+<p:notes xmlns:a="http://schemas.openxmlformats.org/drawingml/2006/main" xmlns:r="http://schemas.openxmlformats.org/officeDocument/2006/relationships" xmlns:p="http://schemas.openxmlformats.org/presentationml/2006/main">
+  <p:cSld>
+    <p:spTree>
+      <p:nvGrpSpPr>
+        <p:cNvPr id="1" name=""/>
+        <p:cNvGrpSpPr/>
+        <p:nvPr/>
+      </p:nvGrpSpPr>
+      <p:grpSpPr>
+        <a:xfrm>
+          <a:off x="0" y="0"/>
+          <a:ext cx="0" cy="0"/>
+          <a:chOff x="0" y="0"/>
+          <a:chExt cx="0" cy="0"/>
+        </a:xfrm>
+      </p:grpSpPr>
+      <p:sp>
+        <p:nvSpPr>
+          <p:cNvPr id="2" name="Slide Image Placeholder 1"/>
+          <p:cNvSpPr>
+            <a:spLocks noGrp="1" noRot="1" noChangeAspect="1"/>
+          </p:cNvSpPr>
+          <p:nvPr>
+            <p:ph type="sldImg"/>
+          </p:nvPr>
+        </p:nvSpPr>
+        <p:spPr/>
+      </p:sp>
+      <p:sp>
+        <p:nvSpPr>
+          <p:cNvPr id="3" name="Notes Placeholder 2"/>
+          <p:cNvSpPr>
+            <a:spLocks noGrp="1"/>
+          </p:cNvSpPr>
+          <p:nvPr>
+            <p:ph type="body" idx="1"/>
+          </p:nvPr>
+        </p:nvSpPr>
+        <p:spPr/>
+        <p:txBody>
+          <a:bodyPr/>
+          <a:lstStyle/>
+          <a:p>
+            <a:r>
+              <a:rPr lang="en-US" sz="1200" dirty="0"/>
+              <a:t>Due to extremely limited information, some subgroups would require prohibitively high sample rates</a:t>
+            </a:r>
+          </a:p>
+          <a:p>
+            <a:r>
+              <a:rPr lang="en-US" sz="1200" dirty="0"/>
+              <a:t>Extreme values highlight the instability of these estimates</a:t>
+            </a:r>
+          </a:p>
+          <a:p>
+            <a:endParaRPr lang="en-US" dirty="0"/>
+          </a:p>
+        </p:txBody>
+      </p:sp>
+      <p:sp>
+        <p:nvSpPr>
+          <p:cNvPr id="4" name="Slide Number Placeholder 3"/>
+          <p:cNvSpPr>
+            <a:spLocks noGrp="1"/>
+          </p:cNvSpPr>
+          <p:nvPr>
+            <p:ph type="sldNum" sz="quarter" idx="5"/>
+          </p:nvPr>
+        </p:nvSpPr>
+        <p:spPr/>
+        <p:txBody>
+          <a:bodyPr/>
+          <a:lstStyle/>
+          <a:p>
+            <a:fld id="{99AE9003-360B-4E18-8AA9-F1BCDFEE0A17}" type="slidenum">
+              <a:rPr lang="en-US" smtClean="0"/>
+              <a:t>12</a:t>
+            </a:fld>
+            <a:endParaRPr lang="en-US"/>
+          </a:p>
+        </p:txBody>
+      </p:sp>
+    </p:spTree>
+    <p:extLst>
+      <p:ext uri="{BB962C8B-B14F-4D97-AF65-F5344CB8AC3E}">
+        <p14:creationId xmlns:p14="http://schemas.microsoft.com/office/powerpoint/2010/main" val="1696266358"/>
       </p:ext>
     </p:extLst>
   </p:cSld>
@@ -620,33 +712,9 @@
           <a:lstStyle/>
           <a:p>
             <a:r>
-              <a:rPr lang="en-US" sz="1200"/>
-              <a:t>Study was well balanced between control and treatment groups</a:t>
-            </a:r>
-            <a:endParaRPr lang="en-US" sz="1200" dirty="0"/>
-          </a:p>
-          <a:p>
-            <a:r>
-              <a:rPr lang="en-US" sz="1200"/>
-              <a:t>Female participants made up 83% of sample</a:t>
-            </a:r>
-            <a:endParaRPr lang="en-US" sz="1200" dirty="0"/>
-          </a:p>
-          <a:p>
-            <a:r>
-              <a:rPr lang="en-US" sz="1200"/>
-              <a:t>Whites made up 52% of total participants</a:t>
-            </a:r>
-            <a:endParaRPr lang="en-US" sz="1200" dirty="0"/>
-          </a:p>
-          <a:p>
-            <a:r>
-              <a:rPr lang="en-US" sz="1200"/>
-              <a:t>Low event rates in subgroups will have an impact on the statistical power of subgroup tests</a:t>
-            </a:r>
-            <a:endParaRPr lang="en-US" sz="1200" dirty="0"/>
-          </a:p>
-          <a:p>
+              <a:rPr lang="en-US"/>
+              <a:t>Represented but Underpowered: Subgroup Inference in the ACTG 320 Trial</a:t>
+            </a:r>
             <a:endParaRPr lang="en-US" dirty="0"/>
           </a:p>
         </p:txBody>
@@ -668,7 +736,7 @@
           <a:p>
             <a:fld id="{99AE9003-360B-4E18-8AA9-F1BCDFEE0A17}" type="slidenum">
               <a:rPr lang="en-US" smtClean="0"/>
-              <a:t>5</a:t>
+              <a:t>3</a:t>
             </a:fld>
             <a:endParaRPr lang="en-US"/>
           </a:p>
@@ -677,7 +745,7 @@
     </p:spTree>
     <p:extLst>
       <p:ext uri="{BB962C8B-B14F-4D97-AF65-F5344CB8AC3E}">
-        <p14:creationId xmlns:p14="http://schemas.microsoft.com/office/powerpoint/2010/main" val="345106314"/>
+        <p14:creationId xmlns:p14="http://schemas.microsoft.com/office/powerpoint/2010/main" val="1829331370"/>
       </p:ext>
     </p:extLst>
   </p:cSld>
@@ -732,109 +800,31 @@
           <a:lstStyle/>
           <a:p>
             <a:r>
-              <a:rPr lang="en-US" b="1"/>
-              <a:t>Two key functions</a:t>
-            </a:r>
-            <a:r>
-              <a:rPr lang="en-US" b="1" dirty="0"/>
-              <a:t>:</a:t>
-            </a:r>
-            <a:endParaRPr lang="en-US" dirty="0"/>
-          </a:p>
-          <a:p>
-            <a:r>
-              <a:rPr lang="en-US" b="1"/>
-              <a:t>Survival function</a:t>
-            </a:r>
-            <a:r>
-              <a:rPr lang="en-US"/>
-              <a:t> S</a:t>
-            </a:r>
-            <a:r>
-              <a:rPr lang="en-US" dirty="0"/>
-              <a:t>(</a:t>
-            </a:r>
-            <a:r>
-              <a:rPr lang="en-US"/>
-              <a:t>t) = P(T &gt; t) — probability of remaining event-free beyond time t</a:t>
-            </a:r>
-            <a:endParaRPr lang="en-US" dirty="0"/>
-          </a:p>
-          <a:p>
-            <a:r>
-              <a:rPr lang="en-US" b="1"/>
-              <a:t>Hazard function</a:t>
-            </a:r>
-            <a:r>
-              <a:rPr lang="en-US"/>
-              <a:t> h</a:t>
-            </a:r>
-            <a:r>
-              <a:rPr lang="en-US" dirty="0"/>
-              <a:t>(</a:t>
-            </a:r>
-            <a:r>
-              <a:rPr lang="en-US"/>
-              <a:t>t) — instantaneous rate of the event at time t, given survival up to t</a:t>
-            </a:r>
-            <a:endParaRPr lang="en-US" dirty="0"/>
-          </a:p>
-          <a:p>
-            <a:r>
-              <a:rPr lang="en-US" b="1"/>
-              <a:t>Kaplan-Meier estimator:</a:t>
-            </a:r>
-            <a:r>
-              <a:rPr lang="en-US"/>
-              <a:t> Non-parametric estimate of S</a:t>
-            </a:r>
-            <a:r>
-              <a:rPr lang="en-US" dirty="0"/>
-              <a:t>(</a:t>
-            </a:r>
-            <a:r>
-              <a:rPr lang="en-US"/>
-              <a:t>t). Drops at each observed event time, accounts for censored observations between events. Used for visualization and log-rank tests</a:t>
-            </a:r>
-            <a:r>
-              <a:rPr lang="en-US" dirty="0"/>
-              <a:t>.</a:t>
-            </a:r>
-          </a:p>
-          <a:p>
-            <a:r>
-              <a:rPr lang="en-US" b="1"/>
-              <a:t>Cox proportional hazards model:</a:t>
-            </a:r>
-            <a:r>
-              <a:rPr lang="en-US"/>
-              <a:t> Semi-parametric regression for time-to-event outcomes. Models the hazard as h</a:t>
-            </a:r>
-            <a:r>
-              <a:rPr lang="en-US" dirty="0"/>
-              <a:t>₀(t)·exp(</a:t>
-            </a:r>
-            <a:r>
-              <a:rPr lang="en-US"/>
-              <a:t>Xᵀβ) — the baseline hazard h</a:t>
-            </a:r>
-            <a:r>
-              <a:rPr lang="en-US" dirty="0"/>
-              <a:t>₀(</a:t>
-            </a:r>
-            <a:r>
-              <a:rPr lang="en-US"/>
-              <a:t>t) is left unspecified, so inference focuses entirely on the coefficient vector β. The key assumption: </a:t>
-            </a:r>
-            <a:r>
-              <a:rPr lang="en-US" b="1"/>
-              <a:t>hazard ratios are constant over time</a:t>
-            </a:r>
-            <a:r>
-              <a:rPr lang="en-US" b="1" dirty="0"/>
-              <a:t>.</a:t>
-            </a:r>
-            <a:endParaRPr lang="en-US" dirty="0"/>
+              <a:rPr lang="en-US" sz="1200"/>
+              <a:t>Study was well balanced between control and treatment groups</a:t>
+            </a:r>
+            <a:endParaRPr lang="en-US" sz="1200" dirty="0"/>
+          </a:p>
+          <a:p>
+            <a:r>
+              <a:rPr lang="en-US" sz="1200"/>
+              <a:t>Female participants made up 83% of sample</a:t>
+            </a:r>
+            <a:endParaRPr lang="en-US" sz="1200" dirty="0"/>
+          </a:p>
+          <a:p>
+            <a:r>
+              <a:rPr lang="en-US" sz="1200"/>
+              <a:t>Whites made up 52% of total participants</a:t>
+            </a:r>
+            <a:endParaRPr lang="en-US" sz="1200" dirty="0"/>
+          </a:p>
+          <a:p>
+            <a:r>
+              <a:rPr lang="en-US" sz="1200"/>
+              <a:t>Low event rates in subgroups will have an impact on the statistical power of subgroup tests</a:t>
+            </a:r>
+            <a:endParaRPr lang="en-US" sz="1200" dirty="0"/>
           </a:p>
           <a:p>
             <a:endParaRPr lang="en-US" dirty="0"/>
@@ -858,7 +848,7 @@
           <a:p>
             <a:fld id="{99AE9003-360B-4E18-8AA9-F1BCDFEE0A17}" type="slidenum">
               <a:rPr lang="en-US" smtClean="0"/>
-              <a:t>6</a:t>
+              <a:t>5</a:t>
             </a:fld>
             <a:endParaRPr lang="en-US"/>
           </a:p>
@@ -867,7 +857,7 @@
     </p:spTree>
     <p:extLst>
       <p:ext uri="{BB962C8B-B14F-4D97-AF65-F5344CB8AC3E}">
-        <p14:creationId xmlns:p14="http://schemas.microsoft.com/office/powerpoint/2010/main" val="4201256535"/>
+        <p14:creationId xmlns:p14="http://schemas.microsoft.com/office/powerpoint/2010/main" val="345106314"/>
       </p:ext>
     </p:extLst>
   </p:cSld>
@@ -922,70 +912,69 @@
           <a:lstStyle/>
           <a:p>
             <a:r>
-              <a:rPr lang="en-US" b="1" dirty="0" err="1"/>
-              <a:t>h_i</a:t>
+              <a:rPr lang="en-US" b="1"/>
+              <a:t>Two key functions</a:t>
             </a:r>
             <a:r>
               <a:rPr lang="en-US" b="1" dirty="0"/>
+              <a:t>:</a:t>
+            </a:r>
+            <a:endParaRPr lang="en-US" dirty="0"/>
+          </a:p>
+          <a:p>
+            <a:r>
+              <a:rPr lang="en-US" b="1"/>
+              <a:t>Survival function</a:t>
+            </a:r>
+            <a:r>
+              <a:rPr lang="en-US"/>
+              <a:t> S</a:t>
+            </a:r>
+            <a:r>
+              <a:rPr lang="en-US" dirty="0"/>
               <a:t>(</a:t>
             </a:r>
             <a:r>
+              <a:rPr lang="en-US"/>
+              <a:t>t) = P(T &gt; t) — probability of remaining event-free beyond time t</a:t>
+            </a:r>
+            <a:endParaRPr lang="en-US" dirty="0"/>
+          </a:p>
+          <a:p>
+            <a:r>
               <a:rPr lang="en-US" b="1"/>
-              <a:t>t)</a:t>
+              <a:t>Hazard function</a:t>
             </a:r>
             <a:r>
               <a:rPr lang="en-US"/>
-              <a:t> — the hazard for person </a:t>
-            </a:r>
-            <a:r>
-              <a:rPr lang="en-US" i="1"/>
-              <a:t>i</a:t>
+              <a:t> h</a:t>
+            </a:r>
+            <a:r>
+              <a:rPr lang="en-US" dirty="0"/>
+              <a:t>(</a:t>
             </a:r>
             <a:r>
               <a:rPr lang="en-US"/>
-              <a:t> at time </a:t>
-            </a:r>
-            <a:r>
-              <a:rPr lang="en-US" i="1"/>
-              <a:t>t</a:t>
+              <a:t>t) — instantaneous rate of the event at time t, given survival up to t</a:t>
+            </a:r>
+            <a:endParaRPr lang="en-US" dirty="0"/>
+          </a:p>
+          <a:p>
+            <a:r>
+              <a:rPr lang="en-US" b="1"/>
+              <a:t>Kaplan-Meier estimator:</a:t>
             </a:r>
             <a:r>
               <a:rPr lang="en-US"/>
-              <a:t>. Think of it as: "what is person </a:t>
-            </a:r>
-            <a:r>
-              <a:rPr lang="en-US" i="1"/>
-              <a:t>i</a:t>
+              <a:t> Non-parametric estimate of S</a:t>
+            </a:r>
+            <a:r>
+              <a:rPr lang="en-US" dirty="0"/>
+              <a:t>(</a:t>
             </a:r>
             <a:r>
               <a:rPr lang="en-US"/>
-              <a:t>'s instantaneous risk of the event (AIDS or death) right now, given they've survived to time t</a:t>
-            </a:r>
-            <a:r>
-              <a:rPr lang="en-US" dirty="0"/>
-              <a:t>?"</a:t>
-            </a:r>
-          </a:p>
-          <a:p>
-            <a:r>
-              <a:rPr lang="en-US" b="1" dirty="0"/>
-              <a:t>h_0(</a:t>
-            </a:r>
-            <a:r>
-              <a:rPr lang="en-US" b="1"/>
-              <a:t>t)</a:t>
-            </a:r>
-            <a:r>
-              <a:rPr lang="en-US"/>
-              <a:t> — the </a:t>
-            </a:r>
-            <a:r>
-              <a:rPr lang="en-US" b="1"/>
-              <a:t>baseline hazard</a:t>
-            </a:r>
-            <a:r>
-              <a:rPr lang="en-US"/>
-              <a:t>. This is the hazard for a person when all their covariates equal zero. It's the part Cox left unspecified — you never actually estimate it, which is what makes the model semi-parametric</a:t>
+              <a:t>t). Drops at each observed event time, accounts for censored observations between events. Used for visualization and log-rank tests</a:t>
             </a:r>
             <a:r>
               <a:rPr lang="en-US" dirty="0"/>
@@ -995,196 +984,37 @@
           <a:p>
             <a:r>
               <a:rPr lang="en-US" b="1"/>
-              <a:t>exp(...)</a:t>
+              <a:t>Cox proportional hazards model:</a:t>
             </a:r>
             <a:r>
               <a:rPr lang="en-US"/>
-              <a:t> — everything inside the exponent shifts the baseline hazard up or down multiplicatively based on the person's characteristics</a:t>
+              <a:t> Semi-parametric regression for time-to-event outcomes. Models the hazard as h</a:t>
             </a:r>
             <a:r>
               <a:rPr lang="en-US" dirty="0"/>
+              <a:t>₀(t)·exp(</a:t>
+            </a:r>
+            <a:r>
+              <a:rPr lang="en-US"/>
+              <a:t>Xᵀβ) — the baseline hazard h</a:t>
+            </a:r>
+            <a:r>
+              <a:rPr lang="en-US" dirty="0"/>
+              <a:t>₀(</a:t>
+            </a:r>
+            <a:r>
+              <a:rPr lang="en-US"/>
+              <a:t>t) is left unspecified, so inference focuses entirely on the coefficient vector β. The key assumption: </a:t>
+            </a:r>
+            <a:r>
+              <a:rPr lang="en-US" b="1"/>
+              <a:t>hazard ratios are constant over time</a:t>
+            </a:r>
+            <a:r>
+              <a:rPr lang="en-US" b="1" dirty="0"/>
               <a:t>.</a:t>
             </a:r>
-          </a:p>
-          <a:p>
-            <a:r>
-              <a:rPr lang="en-US" b="1" dirty="0"/>
-              <a:t>β</a:t>
-            </a:r>
-            <a:r>
-              <a:rPr lang="en-US" b="1"/>
-              <a:t>_1 T_i</a:t>
-            </a:r>
-            <a:r>
-              <a:rPr lang="en-US"/>
-              <a:t> — β_1 is the log hazard ratio for treatment. T_i is 1 if person </a:t>
-            </a:r>
-            <a:r>
-              <a:rPr lang="en-US" i="1"/>
-              <a:t>i</a:t>
-            </a:r>
-            <a:r>
-              <a:rPr lang="en-US"/>
-              <a:t> got indinavir, 0 if not. So exp</a:t>
-            </a:r>
-            <a:r>
-              <a:rPr lang="en-US" dirty="0"/>
-              <a:t>(β_</a:t>
-            </a:r>
-            <a:r>
-              <a:rPr lang="en-US"/>
-              <a:t>1) is the hazard ratio for treatment — in your paper, that comes out to 0.517, meaning indinavir cuts the hazard roughly in half</a:t>
-            </a:r>
-            <a:r>
-              <a:rPr lang="en-US" dirty="0"/>
-              <a:t>.</a:t>
-            </a:r>
-          </a:p>
-          <a:p>
-            <a:r>
-              <a:rPr lang="en-US" b="1" dirty="0"/>
-              <a:t>β_2</a:t>
-            </a:r>
-            <a:r>
-              <a:rPr lang="en-US" b="1"/>
-              <a:t>^T Z_i</a:t>
-            </a:r>
-            <a:r>
-              <a:rPr lang="en-US"/>
-              <a:t> — the superscript T here means </a:t>
-            </a:r>
-            <a:r>
-              <a:rPr lang="en-US" i="1"/>
-              <a:t>transpose</a:t>
-            </a:r>
-            <a:r>
-              <a:rPr lang="en-US"/>
-              <a:t>, not treatment. Z_i is a vector of the other covariates (age, CD4 count, Karnofsky score, etc.), and β_2 is the corresponding vector of coefficients. This term adjusts for all those baseline characteristics simultaneously</a:t>
-            </a:r>
-            <a:r>
-              <a:rPr lang="en-US" dirty="0"/>
-              <a:t>.</a:t>
-            </a:r>
-          </a:p>
-          <a:p>
-            <a:endParaRPr lang="en-US" sz="1200" b="1" dirty="0"/>
-          </a:p>
-          <a:p>
-            <a:endParaRPr lang="en-US" sz="1200" b="1" dirty="0"/>
-          </a:p>
-          <a:p>
-            <a:r>
-              <a:rPr lang="en-US" sz="1200" b="1"/>
-              <a:t>Other Baseline Covariates</a:t>
-            </a:r>
-            <a:endParaRPr lang="en-US" sz="1200" b="1" dirty="0"/>
-          </a:p>
-          <a:p>
-            <a:pPr marL="285750" indent="-285750">
-              <a:buFont typeface="Arial" panose="020B0604020202020204" pitchFamily="34" charset="0"/>
-              <a:buChar char="•"/>
-            </a:pPr>
-            <a:r>
-              <a:rPr lang="en-US" sz="1200"/>
-              <a:t>Baseline CD4 cell count (</a:t>
-            </a:r>
-            <a:r>
-              <a:rPr lang="en-US" sz="1200" dirty="0"/>
-              <a:t>cells/</a:t>
-            </a:r>
-            <a:r>
-              <a:rPr lang="en-US" sz="1200"/>
-              <a:t>mm</a:t>
-            </a:r>
-            <a:r>
-              <a:rPr lang="en-US" sz="1200" baseline="30000"/>
-              <a:t>3</a:t>
-            </a:r>
-            <a:r>
-              <a:rPr lang="en-US" sz="1200"/>
-              <a:t>) measured at enrollment</a:t>
-            </a:r>
-            <a:endParaRPr lang="en-US" sz="1200" dirty="0"/>
-          </a:p>
-          <a:p>
-            <a:pPr marL="285750" indent="-285750">
-              <a:buFont typeface="Arial" panose="020B0604020202020204" pitchFamily="34" charset="0"/>
-              <a:buChar char="•"/>
-            </a:pPr>
-            <a:r>
-              <a:rPr lang="en-US" sz="1200"/>
-              <a:t>Participant age in years at enrollment</a:t>
-            </a:r>
-            <a:endParaRPr lang="en-US" sz="1200" dirty="0"/>
-          </a:p>
-          <a:p>
-            <a:pPr marL="285750" indent="-285750">
-              <a:buFont typeface="Arial" panose="020B0604020202020204" pitchFamily="34" charset="0"/>
-              <a:buChar char="•"/>
-            </a:pPr>
-            <a:r>
-              <a:rPr lang="en-US" sz="1200"/>
-              <a:t>Karnofsky score: A clinical measure of functional status ranging from 0 to 100</a:t>
-            </a:r>
-            <a:endParaRPr lang="en-US" sz="1200" dirty="0"/>
-          </a:p>
-          <a:p>
-            <a:pPr marL="285750" indent="-285750">
-              <a:buFont typeface="Arial" panose="020B0604020202020204" pitchFamily="34" charset="0"/>
-              <a:buChar char="•"/>
-            </a:pPr>
-            <a:r>
-              <a:rPr lang="en-US" sz="1200"/>
-              <a:t>Months of prior zidovudine (ZDV) use before enrollment</a:t>
-            </a:r>
-            <a:endParaRPr lang="en-US" sz="1200" dirty="0"/>
-          </a:p>
-          <a:p>
-            <a:pPr marL="285750" indent="-285750">
-              <a:buFont typeface="Arial" panose="020B0604020202020204" pitchFamily="34" charset="0"/>
-              <a:buChar char="•"/>
-            </a:pPr>
-            <a:r>
-              <a:rPr lang="en-US" sz="1200"/>
-              <a:t>Indicator used for stratified randomization based on CD40 cell count</a:t>
-            </a:r>
-            <a:endParaRPr lang="en-US" sz="1200" dirty="0"/>
-          </a:p>
-          <a:p>
-            <a:pPr marL="285750" indent="-285750">
-              <a:buFont typeface="Arial" panose="020B0604020202020204" pitchFamily="34" charset="0"/>
-              <a:buChar char="•"/>
-            </a:pPr>
-            <a:endParaRPr lang="en-US" sz="1200" dirty="0"/>
-          </a:p>
-          <a:p>
-            <a:pPr lvl="1"/>
-            <a:r>
-              <a:rPr lang="en-US" sz="2400"/>
-              <a:t>The two curves separate early and remain clearly apart throughout follow-up</a:t>
-            </a:r>
-            <a:r>
-              <a:rPr lang="en-US" sz="2400" dirty="0"/>
-              <a:t>.</a:t>
-            </a:r>
-          </a:p>
-          <a:p>
-            <a:pPr lvl="1"/>
-            <a:r>
-              <a:rPr lang="en-US" sz="2400"/>
-              <a:t>Indinavir group maintains substantially higher event-free survival probability</a:t>
-            </a:r>
-            <a:r>
-              <a:rPr lang="en-US" sz="2400" dirty="0"/>
-              <a:t>.</a:t>
-            </a:r>
-          </a:p>
-          <a:p>
-            <a:pPr marL="285750" indent="-285750">
-              <a:buFont typeface="Arial" panose="020B0604020202020204" pitchFamily="34" charset="0"/>
-              <a:buChar char="•"/>
-            </a:pPr>
-            <a:endParaRPr lang="en-US" sz="1200" dirty="0"/>
+            <a:endParaRPr lang="en-US" dirty="0"/>
           </a:p>
           <a:p>
             <a:endParaRPr lang="en-US" dirty="0"/>
@@ -1208,6 +1038,356 @@
           <a:p>
             <a:fld id="{99AE9003-360B-4E18-8AA9-F1BCDFEE0A17}" type="slidenum">
               <a:rPr lang="en-US" smtClean="0"/>
+              <a:t>6</a:t>
+            </a:fld>
+            <a:endParaRPr lang="en-US"/>
+          </a:p>
+        </p:txBody>
+      </p:sp>
+    </p:spTree>
+    <p:extLst>
+      <p:ext uri="{BB962C8B-B14F-4D97-AF65-F5344CB8AC3E}">
+        <p14:creationId xmlns:p14="http://schemas.microsoft.com/office/powerpoint/2010/main" val="4201256535"/>
+      </p:ext>
+    </p:extLst>
+  </p:cSld>
+  <p:clrMapOvr>
+    <a:masterClrMapping/>
+  </p:clrMapOvr>
+</p:notes>
+</file>
+
+<file path=ppt/notesSlides/notesSlide5.xml><?xml version="1.0" encoding="utf-8"?>
+<p:notes xmlns:a="http://schemas.openxmlformats.org/drawingml/2006/main" xmlns:r="http://schemas.openxmlformats.org/officeDocument/2006/relationships" xmlns:p="http://schemas.openxmlformats.org/presentationml/2006/main">
+  <p:cSld>
+    <p:spTree>
+      <p:nvGrpSpPr>
+        <p:cNvPr id="1" name=""/>
+        <p:cNvGrpSpPr/>
+        <p:nvPr/>
+      </p:nvGrpSpPr>
+      <p:grpSpPr>
+        <a:xfrm>
+          <a:off x="0" y="0"/>
+          <a:ext cx="0" cy="0"/>
+          <a:chOff x="0" y="0"/>
+          <a:chExt cx="0" cy="0"/>
+        </a:xfrm>
+      </p:grpSpPr>
+      <p:sp>
+        <p:nvSpPr>
+          <p:cNvPr id="2" name="Slide Image Placeholder 1"/>
+          <p:cNvSpPr>
+            <a:spLocks noGrp="1" noRot="1" noChangeAspect="1"/>
+          </p:cNvSpPr>
+          <p:nvPr>
+            <p:ph type="sldImg"/>
+          </p:nvPr>
+        </p:nvSpPr>
+        <p:spPr/>
+      </p:sp>
+      <p:sp>
+        <p:nvSpPr>
+          <p:cNvPr id="3" name="Notes Placeholder 2"/>
+          <p:cNvSpPr>
+            <a:spLocks noGrp="1"/>
+          </p:cNvSpPr>
+          <p:nvPr>
+            <p:ph type="body" idx="1"/>
+          </p:nvPr>
+        </p:nvSpPr>
+        <p:spPr/>
+        <p:txBody>
+          <a:bodyPr/>
+          <a:lstStyle/>
+          <a:p>
+            <a:r>
+              <a:rPr lang="en-US" b="1" dirty="0" err="1"/>
+              <a:t>h_i</a:t>
+            </a:r>
+            <a:r>
+              <a:rPr lang="en-US" b="1" dirty="0"/>
+              <a:t>(</a:t>
+            </a:r>
+            <a:r>
+              <a:rPr lang="en-US" b="1"/>
+              <a:t>t)</a:t>
+            </a:r>
+            <a:r>
+              <a:rPr lang="en-US"/>
+              <a:t> — the hazard for person </a:t>
+            </a:r>
+            <a:r>
+              <a:rPr lang="en-US" i="1"/>
+              <a:t>i</a:t>
+            </a:r>
+            <a:r>
+              <a:rPr lang="en-US"/>
+              <a:t> at time </a:t>
+            </a:r>
+            <a:r>
+              <a:rPr lang="en-US" i="1"/>
+              <a:t>t</a:t>
+            </a:r>
+            <a:r>
+              <a:rPr lang="en-US"/>
+              <a:t>. Think of it as: "what is person </a:t>
+            </a:r>
+            <a:r>
+              <a:rPr lang="en-US" i="1"/>
+              <a:t>i</a:t>
+            </a:r>
+            <a:r>
+              <a:rPr lang="en-US"/>
+              <a:t>'s instantaneous risk of the event (AIDS or death) right now, given they've survived to time t</a:t>
+            </a:r>
+            <a:r>
+              <a:rPr lang="en-US" dirty="0"/>
+              <a:t>?"</a:t>
+            </a:r>
+          </a:p>
+          <a:p>
+            <a:r>
+              <a:rPr lang="en-US" b="1" dirty="0"/>
+              <a:t>h_0(</a:t>
+            </a:r>
+            <a:r>
+              <a:rPr lang="en-US" b="1"/>
+              <a:t>t)</a:t>
+            </a:r>
+            <a:r>
+              <a:rPr lang="en-US"/>
+              <a:t> — the </a:t>
+            </a:r>
+            <a:r>
+              <a:rPr lang="en-US" b="1"/>
+              <a:t>baseline hazard</a:t>
+            </a:r>
+            <a:r>
+              <a:rPr lang="en-US"/>
+              <a:t>. This is the hazard for a person when all their covariates equal zero. It's the part Cox left unspecified — you never actually estimate it, which is what makes the model semi-parametric</a:t>
+            </a:r>
+            <a:r>
+              <a:rPr lang="en-US" dirty="0"/>
+              <a:t>.</a:t>
+            </a:r>
+          </a:p>
+          <a:p>
+            <a:r>
+              <a:rPr lang="en-US" b="1"/>
+              <a:t>exp(...)</a:t>
+            </a:r>
+            <a:r>
+              <a:rPr lang="en-US"/>
+              <a:t> — everything inside the exponent shifts the baseline hazard up or down multiplicatively based on the person's characteristics</a:t>
+            </a:r>
+            <a:r>
+              <a:rPr lang="en-US" dirty="0"/>
+              <a:t>.</a:t>
+            </a:r>
+          </a:p>
+          <a:p>
+            <a:r>
+              <a:rPr lang="en-US" b="1" dirty="0"/>
+              <a:t>β</a:t>
+            </a:r>
+            <a:r>
+              <a:rPr lang="en-US" b="1"/>
+              <a:t>_1 T_i</a:t>
+            </a:r>
+            <a:r>
+              <a:rPr lang="en-US"/>
+              <a:t> — β_1 is the log hazard ratio for treatment. T_i is 1 if person </a:t>
+            </a:r>
+            <a:r>
+              <a:rPr lang="en-US" i="1"/>
+              <a:t>i</a:t>
+            </a:r>
+            <a:r>
+              <a:rPr lang="en-US"/>
+              <a:t> got indinavir, 0 if not. So exp</a:t>
+            </a:r>
+            <a:r>
+              <a:rPr lang="en-US" dirty="0"/>
+              <a:t>(β_</a:t>
+            </a:r>
+            <a:r>
+              <a:rPr lang="en-US"/>
+              <a:t>1) is the hazard ratio for treatment — in your paper, that comes out to 0.517, meaning indinavir cuts the hazard roughly in half</a:t>
+            </a:r>
+            <a:r>
+              <a:rPr lang="en-US" dirty="0"/>
+              <a:t>.</a:t>
+            </a:r>
+          </a:p>
+          <a:p>
+            <a:r>
+              <a:rPr lang="en-US" b="1" dirty="0"/>
+              <a:t>β_2</a:t>
+            </a:r>
+            <a:r>
+              <a:rPr lang="en-US" b="1"/>
+              <a:t>^T Z_i</a:t>
+            </a:r>
+            <a:r>
+              <a:rPr lang="en-US"/>
+              <a:t> — the superscript T here means </a:t>
+            </a:r>
+            <a:r>
+              <a:rPr lang="en-US" i="1"/>
+              <a:t>transpose</a:t>
+            </a:r>
+            <a:r>
+              <a:rPr lang="en-US"/>
+              <a:t>, not treatment. Z_i is a vector of the other covariates (age, CD4 count, Karnofsky score, etc.), and β_2 is the corresponding vector of coefficients. This term adjusts for all those baseline characteristics simultaneously</a:t>
+            </a:r>
+            <a:r>
+              <a:rPr lang="en-US" dirty="0"/>
+              <a:t>.</a:t>
+            </a:r>
+          </a:p>
+          <a:p>
+            <a:endParaRPr lang="en-US" sz="1200" b="1" dirty="0"/>
+          </a:p>
+          <a:p>
+            <a:endParaRPr lang="en-US" sz="1200" b="1" dirty="0"/>
+          </a:p>
+          <a:p>
+            <a:r>
+              <a:rPr lang="en-US" sz="1200" b="1"/>
+              <a:t>Other Baseline Covariates</a:t>
+            </a:r>
+            <a:endParaRPr lang="en-US" sz="1200" b="1" dirty="0"/>
+          </a:p>
+          <a:p>
+            <a:pPr marL="285750" indent="-285750">
+              <a:buFont typeface="Arial" panose="020B0604020202020204" pitchFamily="34" charset="0"/>
+              <a:buChar char="•"/>
+            </a:pPr>
+            <a:r>
+              <a:rPr lang="en-US" sz="1200"/>
+              <a:t>Baseline CD4 cell count (</a:t>
+            </a:r>
+            <a:r>
+              <a:rPr lang="en-US" sz="1200" dirty="0"/>
+              <a:t>cells/</a:t>
+            </a:r>
+            <a:r>
+              <a:rPr lang="en-US" sz="1200"/>
+              <a:t>mm</a:t>
+            </a:r>
+            <a:r>
+              <a:rPr lang="en-US" sz="1200" baseline="30000"/>
+              <a:t>3</a:t>
+            </a:r>
+            <a:r>
+              <a:rPr lang="en-US" sz="1200"/>
+              <a:t>) measured at enrollment</a:t>
+            </a:r>
+            <a:endParaRPr lang="en-US" sz="1200" dirty="0"/>
+          </a:p>
+          <a:p>
+            <a:pPr marL="285750" indent="-285750">
+              <a:buFont typeface="Arial" panose="020B0604020202020204" pitchFamily="34" charset="0"/>
+              <a:buChar char="•"/>
+            </a:pPr>
+            <a:r>
+              <a:rPr lang="en-US" sz="1200"/>
+              <a:t>Participant age in years at enrollment</a:t>
+            </a:r>
+            <a:endParaRPr lang="en-US" sz="1200" dirty="0"/>
+          </a:p>
+          <a:p>
+            <a:pPr marL="285750" indent="-285750">
+              <a:buFont typeface="Arial" panose="020B0604020202020204" pitchFamily="34" charset="0"/>
+              <a:buChar char="•"/>
+            </a:pPr>
+            <a:r>
+              <a:rPr lang="en-US" sz="1200"/>
+              <a:t>Karnofsky score: A clinical measure of functional status ranging from 0 to 100</a:t>
+            </a:r>
+            <a:endParaRPr lang="en-US" sz="1200" dirty="0"/>
+          </a:p>
+          <a:p>
+            <a:pPr marL="285750" indent="-285750">
+              <a:buFont typeface="Arial" panose="020B0604020202020204" pitchFamily="34" charset="0"/>
+              <a:buChar char="•"/>
+            </a:pPr>
+            <a:r>
+              <a:rPr lang="en-US" sz="1200"/>
+              <a:t>Months of prior zidovudine (ZDV) use before enrollment</a:t>
+            </a:r>
+            <a:endParaRPr lang="en-US" sz="1200" dirty="0"/>
+          </a:p>
+          <a:p>
+            <a:pPr marL="285750" indent="-285750">
+              <a:buFont typeface="Arial" panose="020B0604020202020204" pitchFamily="34" charset="0"/>
+              <a:buChar char="•"/>
+            </a:pPr>
+            <a:r>
+              <a:rPr lang="en-US" sz="1200"/>
+              <a:t>Indicator used for stratified randomization based on CD40 cell count</a:t>
+            </a:r>
+            <a:endParaRPr lang="en-US" sz="1200" dirty="0"/>
+          </a:p>
+          <a:p>
+            <a:pPr marL="285750" indent="-285750">
+              <a:buFont typeface="Arial" panose="020B0604020202020204" pitchFamily="34" charset="0"/>
+              <a:buChar char="•"/>
+            </a:pPr>
+            <a:endParaRPr lang="en-US" sz="1200" dirty="0"/>
+          </a:p>
+          <a:p>
+            <a:pPr lvl="1"/>
+            <a:r>
+              <a:rPr lang="en-US" sz="2400"/>
+              <a:t>The two curves separate early and remain clearly apart throughout follow-up</a:t>
+            </a:r>
+            <a:r>
+              <a:rPr lang="en-US" sz="2400" dirty="0"/>
+              <a:t>.</a:t>
+            </a:r>
+          </a:p>
+          <a:p>
+            <a:pPr lvl="1"/>
+            <a:r>
+              <a:rPr lang="en-US" sz="2400"/>
+              <a:t>Indinavir group maintains substantially higher event-free survival probability</a:t>
+            </a:r>
+            <a:r>
+              <a:rPr lang="en-US" sz="2400" dirty="0"/>
+              <a:t>.</a:t>
+            </a:r>
+          </a:p>
+          <a:p>
+            <a:pPr marL="285750" indent="-285750">
+              <a:buFont typeface="Arial" panose="020B0604020202020204" pitchFamily="34" charset="0"/>
+              <a:buChar char="•"/>
+            </a:pPr>
+            <a:endParaRPr lang="en-US" sz="1200" dirty="0"/>
+          </a:p>
+          <a:p>
+            <a:endParaRPr lang="en-US" dirty="0"/>
+          </a:p>
+        </p:txBody>
+      </p:sp>
+      <p:sp>
+        <p:nvSpPr>
+          <p:cNvPr id="4" name="Slide Number Placeholder 3"/>
+          <p:cNvSpPr>
+            <a:spLocks noGrp="1"/>
+          </p:cNvSpPr>
+          <p:nvPr>
+            <p:ph type="sldNum" sz="quarter" idx="5"/>
+          </p:nvPr>
+        </p:nvSpPr>
+        <p:spPr/>
+        <p:txBody>
+          <a:bodyPr/>
+          <a:lstStyle/>
+          <a:p>
+            <a:fld id="{99AE9003-360B-4E18-8AA9-F1BCDFEE0A17}" type="slidenum">
+              <a:rPr lang="en-US" smtClean="0"/>
               <a:t>7</a:t>
             </a:fld>
             <a:endParaRPr lang="en-US"/>
@@ -1227,7 +1407,7 @@
 </p:notes>
 </file>
 
-<file path=ppt/notesSlides/notesSlide5.xml><?xml version="1.0" encoding="utf-8"?>
+<file path=ppt/notesSlides/notesSlide6.xml><?xml version="1.0" encoding="utf-8"?>
 <p:notes xmlns:a="http://schemas.openxmlformats.org/drawingml/2006/main" xmlns:r="http://schemas.openxmlformats.org/officeDocument/2006/relationships" xmlns:p="http://schemas.openxmlformats.org/presentationml/2006/main">
   <p:cSld>
     <p:spTree>
@@ -1413,7 +1593,7 @@
 </p:notes>
 </file>
 
-<file path=ppt/notesSlides/notesSlide6.xml><?xml version="1.0" encoding="utf-8"?>
+<file path=ppt/notesSlides/notesSlide7.xml><?xml version="1.0" encoding="utf-8"?>
 <p:notes xmlns:a="http://schemas.openxmlformats.org/drawingml/2006/main" xmlns:r="http://schemas.openxmlformats.org/officeDocument/2006/relationships" xmlns:p="http://schemas.openxmlformats.org/presentationml/2006/main">
   <p:cSld>
     <p:spTree>
@@ -1599,108 +1779,6 @@
 </p:notes>
 </file>
 
-<file path=ppt/notesSlides/notesSlide7.xml><?xml version="1.0" encoding="utf-8"?>
-<p:notes xmlns:a="http://schemas.openxmlformats.org/drawingml/2006/main" xmlns:r="http://schemas.openxmlformats.org/officeDocument/2006/relationships" xmlns:p="http://schemas.openxmlformats.org/presentationml/2006/main">
-  <p:cSld>
-    <p:spTree>
-      <p:nvGrpSpPr>
-        <p:cNvPr id="1" name=""/>
-        <p:cNvGrpSpPr/>
-        <p:nvPr/>
-      </p:nvGrpSpPr>
-      <p:grpSpPr>
-        <a:xfrm>
-          <a:off x="0" y="0"/>
-          <a:ext cx="0" cy="0"/>
-          <a:chOff x="0" y="0"/>
-          <a:chExt cx="0" cy="0"/>
-        </a:xfrm>
-      </p:grpSpPr>
-      <p:sp>
-        <p:nvSpPr>
-          <p:cNvPr id="2" name="Slide Image Placeholder 1"/>
-          <p:cNvSpPr>
-            <a:spLocks noGrp="1" noRot="1" noChangeAspect="1"/>
-          </p:cNvSpPr>
-          <p:nvPr>
-            <p:ph type="sldImg"/>
-          </p:nvPr>
-        </p:nvSpPr>
-        <p:spPr/>
-      </p:sp>
-      <p:sp>
-        <p:nvSpPr>
-          <p:cNvPr id="3" name="Notes Placeholder 2"/>
-          <p:cNvSpPr>
-            <a:spLocks noGrp="1"/>
-          </p:cNvSpPr>
-          <p:nvPr>
-            <p:ph type="body" idx="1"/>
-          </p:nvPr>
-        </p:nvSpPr>
-        <p:spPr/>
-        <p:txBody>
-          <a:bodyPr/>
-          <a:lstStyle/>
-          <a:p>
-            <a:r>
-              <a:rPr lang="en-US" sz="1200" dirty="0"/>
-              <a:t>Since clinical trials measure time-to-event, inference is based on number of events instead of sample size</a:t>
-            </a:r>
-          </a:p>
-          <a:p>
-            <a:r>
-              <a:rPr lang="en-US" sz="1200" dirty="0"/>
-              <a:t>The ACTG 320 study did not provide any explicit power analyses, so the power was estimated based on observed actuals</a:t>
-            </a:r>
-          </a:p>
-          <a:p>
-            <a:r>
-              <a:rPr lang="en-US" sz="1200" dirty="0"/>
-              <a:t>Only the Overall and Female groups were powered above 80%; all other groups were underpowered</a:t>
-            </a:r>
-          </a:p>
-          <a:p>
-            <a:endParaRPr lang="en-US" dirty="0"/>
-          </a:p>
-        </p:txBody>
-      </p:sp>
-      <p:sp>
-        <p:nvSpPr>
-          <p:cNvPr id="4" name="Slide Number Placeholder 3"/>
-          <p:cNvSpPr>
-            <a:spLocks noGrp="1"/>
-          </p:cNvSpPr>
-          <p:nvPr>
-            <p:ph type="sldNum" sz="quarter" idx="5"/>
-          </p:nvPr>
-        </p:nvSpPr>
-        <p:spPr/>
-        <p:txBody>
-          <a:bodyPr/>
-          <a:lstStyle/>
-          <a:p>
-            <a:fld id="{99AE9003-360B-4E18-8AA9-F1BCDFEE0A17}" type="slidenum">
-              <a:rPr lang="en-US" smtClean="0"/>
-              <a:t>10</a:t>
-            </a:fld>
-            <a:endParaRPr lang="en-US"/>
-          </a:p>
-        </p:txBody>
-      </p:sp>
-    </p:spTree>
-    <p:extLst>
-      <p:ext uri="{BB962C8B-B14F-4D97-AF65-F5344CB8AC3E}">
-        <p14:creationId xmlns:p14="http://schemas.microsoft.com/office/powerpoint/2010/main" val="366103872"/>
-      </p:ext>
-    </p:extLst>
-  </p:cSld>
-  <p:clrMapOvr>
-    <a:masterClrMapping/>
-  </p:clrMapOvr>
-</p:notes>
-</file>
-
 <file path=ppt/notesSlides/notesSlide8.xml><?xml version="1.0" encoding="utf-8"?>
 <p:notes xmlns:a="http://schemas.openxmlformats.org/drawingml/2006/main" xmlns:r="http://schemas.openxmlformats.org/officeDocument/2006/relationships" xmlns:p="http://schemas.openxmlformats.org/presentationml/2006/main">
   <p:cSld>
@@ -1746,20 +1824,20 @@
           <a:lstStyle/>
           <a:p>
             <a:r>
-              <a:rPr lang="en-US" dirty="0"/>
-              <a:t>Preliminary simulation analysis shows that many of the subgroups were significantly under powered, undermining in the efficacy of the hypothesis tests for subgroup treatment effect analyses</a:t>
-            </a:r>
-          </a:p>
-          <a:p>
-            <a:r>
-              <a:rPr lang="en-US" dirty="0"/>
-              <a:t>A power simulation analysis was conducted to estimate sample size needed to generate power with 80%</a:t>
-            </a:r>
-          </a:p>
-          <a:p>
-            <a:r>
-              <a:rPr lang="en-US" dirty="0"/>
-              <a:t>Effect sizes were readily available for most subgroups but had to be estimated based on plausible HR ranges and observed event rates</a:t>
+              <a:rPr lang="en-US" sz="1200" dirty="0"/>
+              <a:t>Since clinical trials measure time-to-event, inference is based on number of events instead of sample size</a:t>
+            </a:r>
+          </a:p>
+          <a:p>
+            <a:r>
+              <a:rPr lang="en-US" sz="1200" dirty="0"/>
+              <a:t>The ACTG 320 study did not provide any explicit power analyses, so the power was estimated based on observed actuals</a:t>
+            </a:r>
+          </a:p>
+          <a:p>
+            <a:r>
+              <a:rPr lang="en-US" sz="1200" dirty="0"/>
+              <a:t>Only the Overall and Female groups were powered above 80%; all other groups were underpowered</a:t>
             </a:r>
           </a:p>
           <a:p>
@@ -1784,7 +1862,7 @@
           <a:p>
             <a:fld id="{99AE9003-360B-4E18-8AA9-F1BCDFEE0A17}" type="slidenum">
               <a:rPr lang="en-US" smtClean="0"/>
-              <a:t>11</a:t>
+              <a:t>10</a:t>
             </a:fld>
             <a:endParaRPr lang="en-US"/>
           </a:p>
@@ -1793,7 +1871,7 @@
     </p:spTree>
     <p:extLst>
       <p:ext uri="{BB962C8B-B14F-4D97-AF65-F5344CB8AC3E}">
-        <p14:creationId xmlns:p14="http://schemas.microsoft.com/office/powerpoint/2010/main" val="2905437912"/>
+        <p14:creationId xmlns:p14="http://schemas.microsoft.com/office/powerpoint/2010/main" val="366103872"/>
       </p:ext>
     </p:extLst>
   </p:cSld>
@@ -1848,14 +1926,20 @@
           <a:lstStyle/>
           <a:p>
             <a:r>
-              <a:rPr lang="en-US" sz="1200" dirty="0"/>
-              <a:t>Due to extremely limited information, some subgroups would require prohibitively high sample rates</a:t>
-            </a:r>
-          </a:p>
-          <a:p>
-            <a:r>
-              <a:rPr lang="en-US" sz="1200" dirty="0"/>
-              <a:t>Extreme values highlight the instability of these estimates</a:t>
+              <a:rPr lang="en-US" dirty="0"/>
+              <a:t>Preliminary simulation analysis shows that many of the subgroups were significantly under powered, undermining in the efficacy of the hypothesis tests for subgroup treatment effect analyses</a:t>
+            </a:r>
+          </a:p>
+          <a:p>
+            <a:r>
+              <a:rPr lang="en-US" dirty="0"/>
+              <a:t>A power simulation analysis was conducted to estimate sample size needed to generate power with 80%</a:t>
+            </a:r>
+          </a:p>
+          <a:p>
+            <a:r>
+              <a:rPr lang="en-US" dirty="0"/>
+              <a:t>Effect sizes were readily available for most subgroups but had to be estimated based on plausible HR ranges and observed event rates</a:t>
             </a:r>
           </a:p>
           <a:p>
@@ -1880,7 +1964,7 @@
           <a:p>
             <a:fld id="{99AE9003-360B-4E18-8AA9-F1BCDFEE0A17}" type="slidenum">
               <a:rPr lang="en-US" smtClean="0"/>
-              <a:t>12</a:t>
+              <a:t>11</a:t>
             </a:fld>
             <a:endParaRPr lang="en-US"/>
           </a:p>
@@ -1889,7 +1973,7 @@
     </p:spTree>
     <p:extLst>
       <p:ext uri="{BB962C8B-B14F-4D97-AF65-F5344CB8AC3E}">
-        <p14:creationId xmlns:p14="http://schemas.microsoft.com/office/powerpoint/2010/main" val="1696266358"/>
+        <p14:creationId xmlns:p14="http://schemas.microsoft.com/office/powerpoint/2010/main" val="2905437912"/>
       </p:ext>
     </p:extLst>
   </p:cSld>
@@ -2046,7 +2130,7 @@
           <a:p>
             <a:fld id="{6142766A-70DF-4EED-AD06-91C046CCC542}" type="datetime1">
               <a:rPr lang="en-US" smtClean="0"/>
-              <a:t>5/10/2026</a:t>
+              <a:t>5/11/2026</a:t>
             </a:fld>
             <a:endParaRPr lang="en-US"/>
           </a:p>
@@ -2244,7 +2328,7 @@
           <a:p>
             <a:fld id="{677551F4-C417-4178-9C4F-AE395D6DEFF8}" type="datetime1">
               <a:rPr lang="en-US" smtClean="0"/>
-              <a:t>5/10/2026</a:t>
+              <a:t>5/11/2026</a:t>
             </a:fld>
             <a:endParaRPr lang="en-US"/>
           </a:p>
@@ -2452,7 +2536,7 @@
           <a:p>
             <a:fld id="{9045068D-DD41-4230-AE56-63E074B1D952}" type="datetime1">
               <a:rPr lang="en-US" smtClean="0"/>
-              <a:t>5/10/2026</a:t>
+              <a:t>5/11/2026</a:t>
             </a:fld>
             <a:endParaRPr lang="en-US"/>
           </a:p>
@@ -2650,7 +2734,7 @@
           <a:p>
             <a:fld id="{0727FE21-2CD4-4765-8796-2AF547FCD935}" type="datetime1">
               <a:rPr lang="en-US" smtClean="0"/>
-              <a:t>5/10/2026</a:t>
+              <a:t>5/11/2026</a:t>
             </a:fld>
             <a:endParaRPr lang="en-US"/>
           </a:p>
@@ -2925,7 +3009,7 @@
           <a:p>
             <a:fld id="{79BB12C0-F489-429A-AE39-EF60A18F4EB4}" type="datetime1">
               <a:rPr lang="en-US" smtClean="0"/>
-              <a:t>5/10/2026</a:t>
+              <a:t>5/11/2026</a:t>
             </a:fld>
             <a:endParaRPr lang="en-US"/>
           </a:p>
@@ -3190,7 +3274,7 @@
           <a:p>
             <a:fld id="{A491563D-13E1-408D-93AB-67E59C14115F}" type="datetime1">
               <a:rPr lang="en-US" smtClean="0"/>
-              <a:t>5/10/2026</a:t>
+              <a:t>5/11/2026</a:t>
             </a:fld>
             <a:endParaRPr lang="en-US"/>
           </a:p>
@@ -3602,7 +3686,7 @@
           <a:p>
             <a:fld id="{89427240-31ED-4540-8622-12CACEE245EE}" type="datetime1">
               <a:rPr lang="en-US" smtClean="0"/>
-              <a:t>5/10/2026</a:t>
+              <a:t>5/11/2026</a:t>
             </a:fld>
             <a:endParaRPr lang="en-US"/>
           </a:p>
@@ -3743,7 +3827,7 @@
           <a:p>
             <a:fld id="{2B33054F-A5B3-4ED5-9CC9-1E82D6C4F216}" type="datetime1">
               <a:rPr lang="en-US" smtClean="0"/>
-              <a:t>5/10/2026</a:t>
+              <a:t>5/11/2026</a:t>
             </a:fld>
             <a:endParaRPr lang="en-US"/>
           </a:p>
@@ -3856,7 +3940,7 @@
           <a:p>
             <a:fld id="{CCDABC0E-F129-4245-AA2B-27E08B4EDF8B}" type="datetime1">
               <a:rPr lang="en-US" smtClean="0"/>
-              <a:t>5/10/2026</a:t>
+              <a:t>5/11/2026</a:t>
             </a:fld>
             <a:endParaRPr lang="en-US"/>
           </a:p>
@@ -4167,7 +4251,7 @@
           <a:p>
             <a:fld id="{AD18681E-A762-4AB5-A6A0-109C767AE03E}" type="datetime1">
               <a:rPr lang="en-US" smtClean="0"/>
-              <a:t>5/10/2026</a:t>
+              <a:t>5/11/2026</a:t>
             </a:fld>
             <a:endParaRPr lang="en-US"/>
           </a:p>
@@ -4455,7 +4539,7 @@
           <a:p>
             <a:fld id="{A3384EF8-0EC5-414E-B27B-6A9E812407A3}" type="datetime1">
               <a:rPr lang="en-US" smtClean="0"/>
-              <a:t>5/10/2026</a:t>
+              <a:t>5/11/2026</a:t>
             </a:fld>
             <a:endParaRPr lang="en-US"/>
           </a:p>
@@ -4696,7 +4780,7 @@
           <a:p>
             <a:fld id="{1843C63F-9209-4850-A260-94E98C5748EF}" type="datetime1">
               <a:rPr lang="en-US" smtClean="0"/>
-              <a:t>5/10/2026</a:t>
+              <a:t>5/11/2026</a:t>
             </a:fld>
             <a:endParaRPr lang="en-US"/>
           </a:p>
@@ -5203,7 +5287,7 @@
           <p:nvPr/>
         </p:nvPicPr>
         <p:blipFill>
-          <a:blip r:embed="rId2">
+          <a:blip r:embed="rId3">
             <a:alphaModFix/>
             <a:extLst>
               <a:ext uri="{28A0092B-C50C-407E-A947-70E740481C1C}">
@@ -5323,7 +5407,7 @@
         <p:spPr>
           <a:xfrm>
             <a:off x="728663" y="1115219"/>
-            <a:ext cx="5505449" cy="2387600"/>
+            <a:ext cx="8770937" cy="2387600"/>
           </a:xfrm>
         </p:spPr>
         <p:txBody>
@@ -5363,7 +5447,7 @@
         <p:spPr>
           <a:xfrm>
             <a:off x="728663" y="3902075"/>
-            <a:ext cx="5505449" cy="1655762"/>
+            <a:ext cx="6599237" cy="1655762"/>
           </a:xfrm>
         </p:spPr>
         <p:txBody>
@@ -11827,7 +11911,7 @@
           <a:p>
             <a:r>
               <a:rPr lang="en-US" sz="2400" dirty="0"/>
-              <a:t>Future clinical trials should prospectively design subgroup enrollment to achieve subgroup specific power requirements </a:t>
+              <a:t>Future clinical trials should design subgroup enrollment to achieve power requirements </a:t>
             </a:r>
           </a:p>
           <a:p>
@@ -17684,14 +17768,14 @@
           <p:nvPr>
             <p:extLst>
               <p:ext uri="{D42A27DB-BD31-4B8C-83A1-F6EECF244321}">
-                <p14:modId xmlns:p14="http://schemas.microsoft.com/office/powerpoint/2010/main" val="90297758"/>
+                <p14:modId xmlns:p14="http://schemas.microsoft.com/office/powerpoint/2010/main" val="3364760440"/>
               </p:ext>
             </p:extLst>
           </p:nvPr>
         </p:nvGraphicFramePr>
         <p:xfrm>
-          <a:off x="864751" y="1811001"/>
-          <a:ext cx="4481097" cy="1981200"/>
+          <a:off x="500380" y="4636929"/>
+          <a:ext cx="5299592" cy="792480"/>
         </p:xfrm>
         <a:graphic>
           <a:graphicData uri="http://schemas.openxmlformats.org/drawingml/2006/table">
@@ -17700,21 +17784,21 @@
                 <a:tableStyleId>{5C22544A-7EE6-4342-B048-85BDC9FD1C3A}</a:tableStyleId>
               </a:tblPr>
               <a:tblGrid>
-                <a:gridCol w="1509422">
+                <a:gridCol w="2224654">
                   <a:extLst>
                     <a:ext uri="{9D8B030D-6E8A-4147-A177-3AD203B41FA5}">
                       <a16:colId xmlns:a16="http://schemas.microsoft.com/office/drawing/2014/main" val="1446377154"/>
                     </a:ext>
                   </a:extLst>
                 </a:gridCol>
-                <a:gridCol w="1469510">
+                <a:gridCol w="1401786">
                   <a:extLst>
                     <a:ext uri="{9D8B030D-6E8A-4147-A177-3AD203B41FA5}">
                       <a16:colId xmlns:a16="http://schemas.microsoft.com/office/drawing/2014/main" val="82357440"/>
                     </a:ext>
                   </a:extLst>
                 </a:gridCol>
-                <a:gridCol w="1502165">
+                <a:gridCol w="1673152">
                   <a:extLst>
                     <a:ext uri="{9D8B030D-6E8A-4147-A177-3AD203B41FA5}">
                       <a16:colId xmlns:a16="http://schemas.microsoft.com/office/drawing/2014/main" val="3632508132"/>
@@ -17722,59 +17806,6 @@
                   </a:extLst>
                 </a:gridCol>
               </a:tblGrid>
-              <a:tr h="370840">
-                <a:tc gridSpan="3">
-                  <a:txBody>
-                    <a:bodyPr/>
-                    <a:lstStyle/>
-                    <a:p>
-                      <a:pPr algn="ctr"/>
-                      <a:r>
-                        <a:rPr lang="en-US" sz="2000" b="1" dirty="0">
-                          <a:solidFill>
-                            <a:schemeClr val="bg1"/>
-                          </a:solidFill>
-                        </a:rPr>
-                        <a:t>Key Interaction Terms</a:t>
-                      </a:r>
-                    </a:p>
-                  </a:txBody>
-                  <a:tcPr>
-                    <a:solidFill>
-                      <a:schemeClr val="accent1">
-                        <a:lumMod val="75000"/>
-                      </a:schemeClr>
-                    </a:solidFill>
-                  </a:tcPr>
-                </a:tc>
-                <a:tc hMerge="1">
-                  <a:txBody>
-                    <a:bodyPr/>
-                    <a:lstStyle/>
-                    <a:p>
-                      <a:pPr algn="ctr"/>
-                      <a:endParaRPr lang="en-US" dirty="0"/>
-                    </a:p>
-                  </a:txBody>
-                  <a:tcPr/>
-                </a:tc>
-                <a:tc hMerge="1">
-                  <a:txBody>
-                    <a:bodyPr/>
-                    <a:lstStyle/>
-                    <a:p>
-                      <a:pPr algn="ctr"/>
-                      <a:endParaRPr lang="en-US" dirty="0"/>
-                    </a:p>
-                  </a:txBody>
-                  <a:tcPr/>
-                </a:tc>
-                <a:extLst>
-                  <a:ext uri="{0D108BD9-81ED-4DB2-BD59-A6C34878D82A}">
-                    <a16:rowId xmlns:a16="http://schemas.microsoft.com/office/drawing/2014/main" val="3058177909"/>
-                  </a:ext>
-                </a:extLst>
-              </a:tr>
               <a:tr h="370840">
                 <a:tc>
                   <a:txBody>
@@ -17857,108 +17888,12 @@
                     <a:lstStyle/>
                     <a:p>
                       <a:r>
-                        <a:rPr lang="en-US" sz="2000" dirty="0"/>
-                        <a:t>Treatment</a:t>
-                      </a:r>
-                    </a:p>
-                  </a:txBody>
-                  <a:tcPr/>
-                </a:tc>
-                <a:tc>
-                  <a:txBody>
-                    <a:bodyPr/>
-                    <a:lstStyle/>
-                    <a:p>
-                      <a:pPr algn="ctr"/>
-                      <a:r>
-                        <a:rPr lang="en-US" sz="2000" dirty="0"/>
-                        <a:t>0.460</a:t>
-                      </a:r>
-                    </a:p>
-                  </a:txBody>
-                  <a:tcPr/>
-                </a:tc>
-                <a:tc>
-                  <a:txBody>
-                    <a:bodyPr/>
-                    <a:lstStyle/>
-                    <a:p>
-                      <a:pPr algn="ctr"/>
-                      <a:r>
-                        <a:rPr lang="en-US" sz="2000" dirty="0"/>
-                        <a:t>0.001</a:t>
-                      </a:r>
-                    </a:p>
-                  </a:txBody>
-                  <a:tcPr/>
-                </a:tc>
-                <a:extLst>
-                  <a:ext uri="{0D108BD9-81ED-4DB2-BD59-A6C34878D82A}">
-                    <a16:rowId xmlns:a16="http://schemas.microsoft.com/office/drawing/2014/main" val="982728065"/>
-                  </a:ext>
-                </a:extLst>
-              </a:tr>
-              <a:tr h="370840">
-                <a:tc>
-                  <a:txBody>
-                    <a:bodyPr/>
-                    <a:lstStyle/>
-                    <a:p>
-                      <a:r>
-                        <a:rPr lang="en-US" sz="2000" dirty="0"/>
-                        <a:t>Sex</a:t>
-                      </a:r>
-                    </a:p>
-                  </a:txBody>
-                  <a:tcPr/>
-                </a:tc>
-                <a:tc>
-                  <a:txBody>
-                    <a:bodyPr/>
-                    <a:lstStyle/>
-                    <a:p>
-                      <a:pPr algn="ctr"/>
-                      <a:r>
-                        <a:rPr lang="en-US" sz="2000" dirty="0"/>
-                        <a:t>0.854</a:t>
-                      </a:r>
-                    </a:p>
-                  </a:txBody>
-                  <a:tcPr/>
-                </a:tc>
-                <a:tc>
-                  <a:txBody>
-                    <a:bodyPr/>
-                    <a:lstStyle/>
-                    <a:p>
-                      <a:pPr algn="ctr"/>
-                      <a:r>
-                        <a:rPr lang="en-US" sz="2000" dirty="0"/>
-                        <a:t>0.679</a:t>
-                      </a:r>
-                    </a:p>
-                  </a:txBody>
-                  <a:tcPr/>
-                </a:tc>
-                <a:extLst>
-                  <a:ext uri="{0D108BD9-81ED-4DB2-BD59-A6C34878D82A}">
-                    <a16:rowId xmlns:a16="http://schemas.microsoft.com/office/drawing/2014/main" val="1174974162"/>
-                  </a:ext>
-                </a:extLst>
-              </a:tr>
-              <a:tr h="370840">
-                <a:tc>
-                  <a:txBody>
-                    <a:bodyPr/>
-                    <a:lstStyle/>
-                    <a:p>
-                      <a:r>
                         <a:rPr lang="en-US" sz="2000" dirty="0">
                           <a:solidFill>
-                            <a:srgbClr val="FF0000"/>
+                            <a:schemeClr val="tx1"/>
                           </a:solidFill>
                         </a:rPr>
-                        <a:t>Interaction</a:t>
+                        <a:t>M / F Interaction</a:t>
                       </a:r>
                     </a:p>
                   </a:txBody>
@@ -17973,7 +17908,7 @@
                       <a:r>
                         <a:rPr lang="en-US" sz="2000" dirty="0">
                           <a:solidFill>
-                            <a:srgbClr val="FF0000"/>
+                            <a:schemeClr val="tx1"/>
                           </a:solidFill>
                         </a:rPr>
                         <a:t>2.034</a:t>
@@ -17991,7 +17926,7 @@
                       <a:r>
                         <a:rPr lang="en-US" sz="2000" dirty="0">
                           <a:solidFill>
-                            <a:srgbClr val="FF0000"/>
+                            <a:schemeClr val="tx1"/>
                           </a:solidFill>
                         </a:rPr>
                         <a:t>0.214</a:t>
@@ -18003,286 +17938,6 @@
                 <a:extLst>
                   <a:ext uri="{0D108BD9-81ED-4DB2-BD59-A6C34878D82A}">
                     <a16:rowId xmlns:a16="http://schemas.microsoft.com/office/drawing/2014/main" val="4195658078"/>
-                  </a:ext>
-                </a:extLst>
-              </a:tr>
-            </a:tbl>
-          </a:graphicData>
-        </a:graphic>
-      </p:graphicFrame>
-      <p:graphicFrame>
-        <p:nvGraphicFramePr>
-          <p:cNvPr id="5" name="Table 4">
-            <a:extLst>
-              <a:ext uri="{FF2B5EF4-FFF2-40B4-BE49-F238E27FC236}">
-                <a16:creationId xmlns:a16="http://schemas.microsoft.com/office/drawing/2014/main" id="{98F204BF-A6CA-AC9A-D6DF-83AF81F04286}"/>
-              </a:ext>
-            </a:extLst>
-          </p:cNvPr>
-          <p:cNvGraphicFramePr>
-            <a:graphicFrameLocks noGrp="1"/>
-          </p:cNvGraphicFramePr>
-          <p:nvPr>
-            <p:extLst>
-              <p:ext uri="{D42A27DB-BD31-4B8C-83A1-F6EECF244321}">
-                <p14:modId xmlns:p14="http://schemas.microsoft.com/office/powerpoint/2010/main" val="2197250404"/>
-              </p:ext>
-            </p:extLst>
-          </p:nvPr>
-        </p:nvGraphicFramePr>
-        <p:xfrm>
-          <a:off x="864750" y="4062281"/>
-          <a:ext cx="4481097" cy="1584960"/>
-        </p:xfrm>
-        <a:graphic>
-          <a:graphicData uri="http://schemas.openxmlformats.org/drawingml/2006/table">
-            <a:tbl>
-              <a:tblPr bandRow="1">
-                <a:tableStyleId>{5C22544A-7EE6-4342-B048-85BDC9FD1C3A}</a:tableStyleId>
-              </a:tblPr>
-              <a:tblGrid>
-                <a:gridCol w="1493699">
-                  <a:extLst>
-                    <a:ext uri="{9D8B030D-6E8A-4147-A177-3AD203B41FA5}">
-                      <a16:colId xmlns:a16="http://schemas.microsoft.com/office/drawing/2014/main" val="193391568"/>
-                    </a:ext>
-                  </a:extLst>
-                </a:gridCol>
-                <a:gridCol w="1493699">
-                  <a:extLst>
-                    <a:ext uri="{9D8B030D-6E8A-4147-A177-3AD203B41FA5}">
-                      <a16:colId xmlns:a16="http://schemas.microsoft.com/office/drawing/2014/main" val="3093339358"/>
-                    </a:ext>
-                  </a:extLst>
-                </a:gridCol>
-                <a:gridCol w="1493699">
-                  <a:extLst>
-                    <a:ext uri="{9D8B030D-6E8A-4147-A177-3AD203B41FA5}">
-                      <a16:colId xmlns:a16="http://schemas.microsoft.com/office/drawing/2014/main" val="4180537643"/>
-                    </a:ext>
-                  </a:extLst>
-                </a:gridCol>
-              </a:tblGrid>
-              <a:tr h="370840">
-                <a:tc gridSpan="3">
-                  <a:txBody>
-                    <a:bodyPr/>
-                    <a:lstStyle/>
-                    <a:p>
-                      <a:pPr algn="ctr"/>
-                      <a:r>
-                        <a:rPr lang="en-US" sz="2000" b="1" dirty="0">
-                          <a:solidFill>
-                            <a:schemeClr val="bg1"/>
-                          </a:solidFill>
-                        </a:rPr>
-                        <a:t>Group Counts</a:t>
-                      </a:r>
-                    </a:p>
-                  </a:txBody>
-                  <a:tcPr>
-                    <a:solidFill>
-                      <a:schemeClr val="accent1">
-                        <a:lumMod val="75000"/>
-                      </a:schemeClr>
-                    </a:solidFill>
-                  </a:tcPr>
-                </a:tc>
-                <a:tc hMerge="1">
-                  <a:txBody>
-                    <a:bodyPr/>
-                    <a:lstStyle/>
-                    <a:p>
-                      <a:endParaRPr lang="en-US" dirty="0"/>
-                    </a:p>
-                  </a:txBody>
-                  <a:tcPr/>
-                </a:tc>
-                <a:tc hMerge="1">
-                  <a:txBody>
-                    <a:bodyPr/>
-                    <a:lstStyle/>
-                    <a:p>
-                      <a:endParaRPr lang="en-US" dirty="0"/>
-                    </a:p>
-                  </a:txBody>
-                  <a:tcPr/>
-                </a:tc>
-                <a:extLst>
-                  <a:ext uri="{0D108BD9-81ED-4DB2-BD59-A6C34878D82A}">
-                    <a16:rowId xmlns:a16="http://schemas.microsoft.com/office/drawing/2014/main" val="3388447168"/>
-                  </a:ext>
-                </a:extLst>
-              </a:tr>
-              <a:tr h="370840">
-                <a:tc>
-                  <a:txBody>
-                    <a:bodyPr/>
-                    <a:lstStyle/>
-                    <a:p>
-                      <a:pPr algn="ctr"/>
-                      <a:endParaRPr lang="en-US" sz="2000" b="1" dirty="0">
-                        <a:solidFill>
-                          <a:schemeClr val="bg1"/>
-                        </a:solidFill>
-                      </a:endParaRPr>
-                    </a:p>
-                  </a:txBody>
-                  <a:tcPr>
-                    <a:solidFill>
-                      <a:schemeClr val="accent1">
-                        <a:lumMod val="75000"/>
-                      </a:schemeClr>
-                    </a:solidFill>
-                  </a:tcPr>
-                </a:tc>
-                <a:tc>
-                  <a:txBody>
-                    <a:bodyPr/>
-                    <a:lstStyle/>
-                    <a:p>
-                      <a:pPr algn="ctr"/>
-                      <a:r>
-                        <a:rPr lang="en-US" sz="2000" b="1" dirty="0">
-                          <a:solidFill>
-                            <a:schemeClr val="bg1"/>
-                          </a:solidFill>
-                        </a:rPr>
-                        <a:t>Sample</a:t>
-                      </a:r>
-                    </a:p>
-                  </a:txBody>
-                  <a:tcPr>
-                    <a:solidFill>
-                      <a:schemeClr val="accent1">
-                        <a:lumMod val="75000"/>
-                      </a:schemeClr>
-                    </a:solidFill>
-                  </a:tcPr>
-                </a:tc>
-                <a:tc>
-                  <a:txBody>
-                    <a:bodyPr/>
-                    <a:lstStyle/>
-                    <a:p>
-                      <a:pPr algn="ctr"/>
-                      <a:r>
-                        <a:rPr lang="en-US" sz="2000" b="1" dirty="0">
-                          <a:solidFill>
-                            <a:schemeClr val="bg1"/>
-                          </a:solidFill>
-                        </a:rPr>
-                        <a:t>Events</a:t>
-                      </a:r>
-                    </a:p>
-                  </a:txBody>
-                  <a:tcPr>
-                    <a:solidFill>
-                      <a:schemeClr val="accent1">
-                        <a:lumMod val="75000"/>
-                      </a:schemeClr>
-                    </a:solidFill>
-                  </a:tcPr>
-                </a:tc>
-                <a:extLst>
-                  <a:ext uri="{0D108BD9-81ED-4DB2-BD59-A6C34878D82A}">
-                    <a16:rowId xmlns:a16="http://schemas.microsoft.com/office/drawing/2014/main" val="3808736945"/>
-                  </a:ext>
-                </a:extLst>
-              </a:tr>
-              <a:tr h="370840">
-                <a:tc>
-                  <a:txBody>
-                    <a:bodyPr/>
-                    <a:lstStyle/>
-                    <a:p>
-                      <a:r>
-                        <a:rPr lang="en-US" sz="2000" dirty="0"/>
-                        <a:t>Female</a:t>
-                      </a:r>
-                    </a:p>
-                  </a:txBody>
-                  <a:tcPr/>
-                </a:tc>
-                <a:tc>
-                  <a:txBody>
-                    <a:bodyPr/>
-                    <a:lstStyle/>
-                    <a:p>
-                      <a:pPr algn="ctr"/>
-                      <a:r>
-                        <a:rPr lang="en-US" sz="2000" dirty="0"/>
-                        <a:t>951</a:t>
-                      </a:r>
-                    </a:p>
-                  </a:txBody>
-                  <a:tcPr/>
-                </a:tc>
-                <a:tc>
-                  <a:txBody>
-                    <a:bodyPr/>
-                    <a:lstStyle/>
-                    <a:p>
-                      <a:pPr algn="ctr"/>
-                      <a:r>
-                        <a:rPr lang="en-US" sz="2000" dirty="0"/>
-                        <a:t>81</a:t>
-                      </a:r>
-                    </a:p>
-                  </a:txBody>
-                  <a:tcPr/>
-                </a:tc>
-                <a:extLst>
-                  <a:ext uri="{0D108BD9-81ED-4DB2-BD59-A6C34878D82A}">
-                    <a16:rowId xmlns:a16="http://schemas.microsoft.com/office/drawing/2014/main" val="3041809135"/>
-                  </a:ext>
-                </a:extLst>
-              </a:tr>
-              <a:tr h="370840">
-                <a:tc>
-                  <a:txBody>
-                    <a:bodyPr/>
-                    <a:lstStyle/>
-                    <a:p>
-                      <a:r>
-                        <a:rPr lang="en-US" sz="2000" dirty="0"/>
-                        <a:t>Male</a:t>
-                      </a:r>
-                    </a:p>
-                  </a:txBody>
-                  <a:tcPr/>
-                </a:tc>
-                <a:tc>
-                  <a:txBody>
-                    <a:bodyPr/>
-                    <a:lstStyle/>
-                    <a:p>
-                      <a:pPr algn="ctr"/>
-                      <a:r>
-                        <a:rPr lang="en-US" sz="2000" dirty="0"/>
-                        <a:t>200</a:t>
-                      </a:r>
-                    </a:p>
-                  </a:txBody>
-                  <a:tcPr/>
-                </a:tc>
-                <a:tc>
-                  <a:txBody>
-                    <a:bodyPr/>
-                    <a:lstStyle/>
-                    <a:p>
-                      <a:pPr algn="ctr"/>
-                      <a:r>
-                        <a:rPr lang="en-US" sz="2000" dirty="0"/>
-                        <a:t>15</a:t>
-                      </a:r>
-                    </a:p>
-                  </a:txBody>
-                  <a:tcPr/>
-                </a:tc>
-                <a:extLst>
-                  <a:ext uri="{0D108BD9-81ED-4DB2-BD59-A6C34878D82A}">
-                    <a16:rowId xmlns:a16="http://schemas.microsoft.com/office/drawing/2014/main" val="833687040"/>
                   </a:ext>
                 </a:extLst>
               </a:tr>
@@ -18304,8 +17959,8 @@
         </p:nvSpPr>
         <p:spPr>
           <a:xfrm>
-            <a:off x="6096000" y="3675514"/>
-            <a:ext cx="5114925" cy="1981201"/>
+            <a:off x="6567925" y="1840579"/>
+            <a:ext cx="5114925" cy="3233440"/>
           </a:xfrm>
           <a:prstGeom prst="rect">
             <a:avLst/>
@@ -18324,7 +17979,7 @@
           <a:p>
             <a:pPr algn="ctr"/>
             <a:r>
-              <a:rPr lang="en-US" sz="2000" b="1" dirty="0"/>
+              <a:rPr lang="en-US" sz="2400" b="1" dirty="0"/>
               <a:t>Interpretation</a:t>
             </a:r>
           </a:p>
@@ -18334,8 +17989,8 @@
               <a:buChar char="•"/>
             </a:pPr>
             <a:r>
-              <a:rPr lang="en-US" sz="2000" dirty="0"/>
-              <a:t>Male subgroup is severely underpowered</a:t>
+              <a:rPr lang="en-US" sz="2400" dirty="0"/>
+              <a:t>Treatment effects do not appear to be different based on LRT p-value</a:t>
             </a:r>
           </a:p>
           <a:p>
@@ -18344,9 +17999,26 @@
               <a:buChar char="•"/>
             </a:pPr>
             <a:r>
-              <a:rPr lang="en-US" sz="2000" dirty="0"/>
-              <a:t> Wide CI and unstable HR mean we cannot draw conclusions about male-specific treatment benefit</a:t>
-            </a:r>
+              <a:rPr lang="en-US" sz="2400" dirty="0"/>
+              <a:t>Substantial overlap in CI intervals suggests high level of uncertainty whether treatment effects are truly different</a:t>
+            </a:r>
+          </a:p>
+          <a:p>
+            <a:pPr marL="355600" lvl="1" indent="-342900">
+              <a:buFont typeface="Arial" panose="020B0604020202020204" pitchFamily="34" charset="0"/>
+              <a:buChar char="•"/>
+            </a:pPr>
+            <a:r>
+              <a:rPr lang="en-US" sz="2400" dirty="0"/>
+              <a:t>M / F interaction is not significant</a:t>
+            </a:r>
+          </a:p>
+          <a:p>
+            <a:pPr marL="355600" lvl="1" indent="-342900">
+              <a:buFont typeface="Arial" panose="020B0604020202020204" pitchFamily="34" charset="0"/>
+              <a:buChar char="•"/>
+            </a:pPr>
+            <a:endParaRPr lang="en-US" sz="2400" dirty="0"/>
           </a:p>
         </p:txBody>
       </p:sp>
@@ -18365,14 +18037,14 @@
           <p:nvPr>
             <p:extLst>
               <p:ext uri="{D42A27DB-BD31-4B8C-83A1-F6EECF244321}">
-                <p14:modId xmlns:p14="http://schemas.microsoft.com/office/powerpoint/2010/main" val="2676848882"/>
+                <p14:modId xmlns:p14="http://schemas.microsoft.com/office/powerpoint/2010/main" val="3103603620"/>
               </p:ext>
             </p:extLst>
           </p:nvPr>
         </p:nvGraphicFramePr>
         <p:xfrm>
-          <a:off x="6096000" y="1811001"/>
-          <a:ext cx="5114926" cy="1584960"/>
+          <a:off x="509150" y="2850551"/>
+          <a:ext cx="5290821" cy="1584960"/>
         </p:xfrm>
         <a:graphic>
           <a:graphicData uri="http://schemas.openxmlformats.org/drawingml/2006/table">
@@ -18381,23 +18053,30 @@
                 <a:tableStyleId>{5C22544A-7EE6-4342-B048-85BDC9FD1C3A}</a:tableStyleId>
               </a:tblPr>
               <a:tblGrid>
-                <a:gridCol w="2557463">
+                <a:gridCol w="1185228">
                   <a:extLst>
                     <a:ext uri="{9D8B030D-6E8A-4147-A177-3AD203B41FA5}">
                       <a16:colId xmlns:a16="http://schemas.microsoft.com/office/drawing/2014/main" val="1779458928"/>
                     </a:ext>
                   </a:extLst>
                 </a:gridCol>
-                <a:gridCol w="2557463">
+                <a:gridCol w="2400618">
                   <a:extLst>
                     <a:ext uri="{9D8B030D-6E8A-4147-A177-3AD203B41FA5}">
                       <a16:colId xmlns:a16="http://schemas.microsoft.com/office/drawing/2014/main" val="2869337161"/>
                     </a:ext>
                   </a:extLst>
                 </a:gridCol>
+                <a:gridCol w="1704975">
+                  <a:extLst>
+                    <a:ext uri="{9D8B030D-6E8A-4147-A177-3AD203B41FA5}">
+                      <a16:colId xmlns:a16="http://schemas.microsoft.com/office/drawing/2014/main" val="1360775584"/>
+                    </a:ext>
+                  </a:extLst>
+                </a:gridCol>
               </a:tblGrid>
-              <a:tr h="370840">
-                <a:tc gridSpan="2">
+              <a:tr h="219542">
+                <a:tc gridSpan="3">
                   <a:txBody>
                     <a:bodyPr/>
                     <a:lstStyle/>
@@ -18409,7 +18088,7 @@
                             <a:schemeClr val="bg1"/>
                           </a:solidFill>
                         </a:rPr>
-                        <a:t>Sex Interaction Model</a:t>
+                        <a:t>Treatment/Control HR Estimates</a:t>
                       </a:r>
                     </a:p>
                   </a:txBody>
@@ -18420,8 +18099,14 @@
                     <a:lnR w="12700" cmpd="sng">
                       <a:noFill/>
                     </a:lnR>
-                    <a:lnT w="12700" cmpd="sng">
-                      <a:noFill/>
+                    <a:lnT w="9525" cap="flat" cmpd="sng" algn="ctr">
+                      <a:solidFill>
+                        <a:schemeClr val="bg1"/>
+                      </a:solidFill>
+                      <a:prstDash val="solid"/>
+                      <a:round/>
+                      <a:headEnd type="none" w="med" len="med"/>
+                      <a:tailEnd type="none" w="med" len="med"/>
                     </a:lnT>
                     <a:lnB w="9525" cap="flat" cmpd="sng" algn="ctr">
                       <a:solidFill>
@@ -18452,26 +18137,143 @@
                     <a:bodyPr/>
                     <a:lstStyle/>
                     <a:p>
-                      <a:endParaRPr lang="en-US" dirty="0"/>
+                      <a:pPr marL="0" marR="0" lvl="0" indent="0" algn="ctr" defTabSz="914400" rtl="0" eaLnBrk="1" fontAlgn="auto" latinLnBrk="0" hangingPunct="1">
+                        <a:lnSpc>
+                          <a:spcPct val="100000"/>
+                        </a:lnSpc>
+                        <a:spcBef>
+                          <a:spcPts val="0"/>
+                        </a:spcBef>
+                        <a:spcAft>
+                          <a:spcPts val="0"/>
+                        </a:spcAft>
+                        <a:buClrTx/>
+                        <a:buSzTx/>
+                        <a:buFontTx/>
+                        <a:buNone/>
+                        <a:tabLst/>
+                        <a:defRPr/>
+                      </a:pPr>
+                      <a:endParaRPr lang="en-US" sz="2000" b="1" dirty="0">
+                        <a:solidFill>
+                          <a:schemeClr val="bg1"/>
+                        </a:solidFill>
+                      </a:endParaRPr>
                     </a:p>
                   </a:txBody>
-                  <a:tcPr/>
+                  <a:tcPr>
+                    <a:lnL w="12700" cmpd="sng">
+                      <a:noFill/>
+                    </a:lnL>
+                    <a:lnR w="12700" cmpd="sng">
+                      <a:noFill/>
+                    </a:lnR>
+                    <a:lnT w="9525" cap="flat" cmpd="sng" algn="ctr">
+                      <a:solidFill>
+                        <a:schemeClr val="bg1"/>
+                      </a:solidFill>
+                      <a:prstDash val="solid"/>
+                      <a:round/>
+                      <a:headEnd type="none" w="med" len="med"/>
+                      <a:tailEnd type="none" w="med" len="med"/>
+                    </a:lnT>
+                    <a:lnB w="9525" cap="flat" cmpd="sng" algn="ctr">
+                      <a:solidFill>
+                        <a:schemeClr val="bg1"/>
+                      </a:solidFill>
+                      <a:prstDash val="solid"/>
+                      <a:round/>
+                      <a:headEnd type="none" w="med" len="med"/>
+                      <a:tailEnd type="none" w="med" len="med"/>
+                    </a:lnB>
+                    <a:lnTlToBr w="12700" cmpd="sng">
+                      <a:noFill/>
+                      <a:prstDash val="solid"/>
+                    </a:lnTlToBr>
+                    <a:lnBlToTr w="12700" cmpd="sng">
+                      <a:noFill/>
+                      <a:prstDash val="solid"/>
+                    </a:lnBlToTr>
+                    <a:solidFill>
+                      <a:schemeClr val="accent1">
+                        <a:lumMod val="75000"/>
+                      </a:schemeClr>
+                    </a:solidFill>
+                  </a:tcPr>
+                </a:tc>
+                <a:tc hMerge="1">
+                  <a:txBody>
+                    <a:bodyPr/>
+                    <a:lstStyle/>
+                    <a:p>
+                      <a:pPr algn="ctr"/>
+                      <a:endParaRPr lang="en-US" sz="2000" b="1" dirty="0">
+                        <a:solidFill>
+                          <a:schemeClr val="bg1"/>
+                        </a:solidFill>
+                      </a:endParaRPr>
+                    </a:p>
+                  </a:txBody>
+                  <a:tcPr>
+                    <a:lnL w="12700" cmpd="sng">
+                      <a:noFill/>
+                    </a:lnL>
+                    <a:lnR w="12700" cmpd="sng">
+                      <a:noFill/>
+                    </a:lnR>
+                    <a:lnT w="9525" cap="flat" cmpd="sng" algn="ctr">
+                      <a:solidFill>
+                        <a:schemeClr val="bg1"/>
+                      </a:solidFill>
+                      <a:prstDash val="solid"/>
+                      <a:round/>
+                      <a:headEnd type="none" w="med" len="med"/>
+                      <a:tailEnd type="none" w="med" len="med"/>
+                    </a:lnT>
+                    <a:lnB w="9525" cap="flat" cmpd="sng" algn="ctr">
+                      <a:solidFill>
+                        <a:schemeClr val="bg1"/>
+                      </a:solidFill>
+                      <a:prstDash val="solid"/>
+                      <a:round/>
+                      <a:headEnd type="none" w="med" len="med"/>
+                      <a:tailEnd type="none" w="med" len="med"/>
+                    </a:lnB>
+                    <a:lnTlToBr w="12700" cmpd="sng">
+                      <a:noFill/>
+                      <a:prstDash val="solid"/>
+                    </a:lnTlToBr>
+                    <a:lnBlToTr w="12700" cmpd="sng">
+                      <a:noFill/>
+                      <a:prstDash val="solid"/>
+                    </a:lnBlToTr>
+                    <a:solidFill>
+                      <a:schemeClr val="accent1">
+                        <a:lumMod val="75000"/>
+                      </a:schemeClr>
+                    </a:solidFill>
+                  </a:tcPr>
                 </a:tc>
                 <a:extLst>
                   <a:ext uri="{0D108BD9-81ED-4DB2-BD59-A6C34878D82A}">
-                    <a16:rowId xmlns:a16="http://schemas.microsoft.com/office/drawing/2014/main" val="1397225430"/>
+                    <a16:rowId xmlns:a16="http://schemas.microsoft.com/office/drawing/2014/main" val="4041949388"/>
                   </a:ext>
                 </a:extLst>
               </a:tr>
-              <a:tr h="370840">
+              <a:tr h="219542">
                 <a:tc>
                   <a:txBody>
                     <a:bodyPr/>
                     <a:lstStyle/>
                     <a:p>
+                      <a:pPr algn="ctr"/>
                       <a:r>
-                        <a:rPr lang="en-US" sz="2000" dirty="0"/>
-                        <a:t>LRT p-value</a:t>
+                        <a:rPr lang="en-US" sz="2000" b="1" dirty="0">
+                          <a:solidFill>
+                            <a:schemeClr val="bg1"/>
+                          </a:solidFill>
+                        </a:rPr>
+                        <a:t>Variable</a:t>
                       </a:r>
                     </a:p>
                   </a:txBody>
@@ -18479,14 +18281,8 @@
                     <a:lnL w="12700" cmpd="sng">
                       <a:noFill/>
                     </a:lnL>
-                    <a:lnR w="9525" cap="flat" cmpd="sng" algn="ctr">
-                      <a:solidFill>
-                        <a:schemeClr val="bg1"/>
-                      </a:solidFill>
-                      <a:prstDash val="solid"/>
-                      <a:round/>
-                      <a:headEnd type="none" w="med" len="med"/>
-                      <a:tailEnd type="none" w="med" len="med"/>
+                    <a:lnR w="12700" cmpd="sng">
+                      <a:noFill/>
                     </a:lnR>
                     <a:lnT w="9525" cap="flat" cmpd="sng" algn="ctr">
                       <a:solidFill>
@@ -18514,6 +18310,83 @@
                       <a:noFill/>
                       <a:prstDash val="solid"/>
                     </a:lnBlToTr>
+                    <a:solidFill>
+                      <a:schemeClr val="accent1">
+                        <a:lumMod val="75000"/>
+                      </a:schemeClr>
+                    </a:solidFill>
+                  </a:tcPr>
+                </a:tc>
+                <a:tc>
+                  <a:txBody>
+                    <a:bodyPr/>
+                    <a:lstStyle/>
+                    <a:p>
+                      <a:pPr marL="0" marR="0" lvl="0" indent="0" algn="ctr" defTabSz="914400" rtl="0" eaLnBrk="1" fontAlgn="auto" latinLnBrk="0" hangingPunct="1">
+                        <a:lnSpc>
+                          <a:spcPct val="100000"/>
+                        </a:lnSpc>
+                        <a:spcBef>
+                          <a:spcPts val="0"/>
+                        </a:spcBef>
+                        <a:spcAft>
+                          <a:spcPts val="0"/>
+                        </a:spcAft>
+                        <a:buClrTx/>
+                        <a:buSzTx/>
+                        <a:buFontTx/>
+                        <a:buNone/>
+                        <a:tabLst/>
+                        <a:defRPr/>
+                      </a:pPr>
+                      <a:r>
+                        <a:rPr lang="en-US" sz="2000" b="1" dirty="0">
+                          <a:solidFill>
+                            <a:schemeClr val="bg1"/>
+                          </a:solidFill>
+                        </a:rPr>
+                        <a:t>HR [95% CI]</a:t>
+                      </a:r>
+                    </a:p>
+                  </a:txBody>
+                  <a:tcPr>
+                    <a:lnL w="12700" cmpd="sng">
+                      <a:noFill/>
+                    </a:lnL>
+                    <a:lnR w="12700" cmpd="sng">
+                      <a:noFill/>
+                    </a:lnR>
+                    <a:lnT w="9525" cap="flat" cmpd="sng" algn="ctr">
+                      <a:solidFill>
+                        <a:schemeClr val="bg1"/>
+                      </a:solidFill>
+                      <a:prstDash val="solid"/>
+                      <a:round/>
+                      <a:headEnd type="none" w="med" len="med"/>
+                      <a:tailEnd type="none" w="med" len="med"/>
+                    </a:lnT>
+                    <a:lnB w="9525" cap="flat" cmpd="sng" algn="ctr">
+                      <a:solidFill>
+                        <a:schemeClr val="bg1"/>
+                      </a:solidFill>
+                      <a:prstDash val="solid"/>
+                      <a:round/>
+                      <a:headEnd type="none" w="med" len="med"/>
+                      <a:tailEnd type="none" w="med" len="med"/>
+                    </a:lnB>
+                    <a:lnTlToBr w="12700" cmpd="sng">
+                      <a:noFill/>
+                      <a:prstDash val="solid"/>
+                    </a:lnTlToBr>
+                    <a:lnBlToTr w="12700" cmpd="sng">
+                      <a:noFill/>
+                      <a:prstDash val="solid"/>
+                    </a:lnBlToTr>
+                    <a:solidFill>
+                      <a:schemeClr val="accent1">
+                        <a:lumMod val="75000"/>
+                      </a:schemeClr>
+                    </a:solidFill>
                   </a:tcPr>
                 </a:tc>
                 <a:tc>
@@ -18523,20 +18396,18 @@
                     <a:p>
                       <a:pPr algn="ctr"/>
                       <a:r>
-                        <a:rPr lang="en-US" sz="2000" dirty="0"/>
-                        <a:t>0.2187</a:t>
+                        <a:rPr lang="en-US" sz="2000" b="1" dirty="0">
+                          <a:solidFill>
+                            <a:schemeClr val="bg1"/>
+                          </a:solidFill>
+                        </a:rPr>
+                        <a:t>Event Count</a:t>
                       </a:r>
                     </a:p>
                   </a:txBody>
                   <a:tcPr>
-                    <a:lnL w="9525" cap="flat" cmpd="sng" algn="ctr">
-                      <a:solidFill>
-                        <a:schemeClr val="bg1"/>
-                      </a:solidFill>
-                      <a:prstDash val="solid"/>
-                      <a:round/>
-                      <a:headEnd type="none" w="med" len="med"/>
-                      <a:tailEnd type="none" w="med" len="med"/>
+                    <a:lnL w="12700" cmpd="sng">
+                      <a:noFill/>
                     </a:lnL>
                     <a:lnR w="12700" cmpd="sng">
                       <a:noFill/>
@@ -18567,15 +18438,20 @@
                       <a:noFill/>
                       <a:prstDash val="solid"/>
                     </a:lnBlToTr>
+                    <a:solidFill>
+                      <a:schemeClr val="accent1">
+                        <a:lumMod val="75000"/>
+                      </a:schemeClr>
+                    </a:solidFill>
                   </a:tcPr>
                 </a:tc>
                 <a:extLst>
                   <a:ext uri="{0D108BD9-81ED-4DB2-BD59-A6C34878D82A}">
-                    <a16:rowId xmlns:a16="http://schemas.microsoft.com/office/drawing/2014/main" val="402482031"/>
+                    <a16:rowId xmlns:a16="http://schemas.microsoft.com/office/drawing/2014/main" val="2507220180"/>
                   </a:ext>
                 </a:extLst>
               </a:tr>
-              <a:tr h="370840">
+              <a:tr h="124089">
                 <a:tc>
                   <a:txBody>
                     <a:bodyPr/>
@@ -18583,7 +18459,7 @@
                     <a:p>
                       <a:r>
                         <a:rPr lang="en-US" sz="2000" dirty="0"/>
-                        <a:t>Female HR [95% CI]</a:t>
+                        <a:t>Female</a:t>
                       </a:r>
                     </a:p>
                   </a:txBody>
@@ -18650,6 +18526,65 @@
                       <a:headEnd type="none" w="med" len="med"/>
                       <a:tailEnd type="none" w="med" len="med"/>
                     </a:lnL>
+                    <a:lnR w="9525" cap="flat" cmpd="sng" algn="ctr">
+                      <a:solidFill>
+                        <a:schemeClr val="bg1"/>
+                      </a:solidFill>
+                      <a:prstDash val="solid"/>
+                      <a:round/>
+                      <a:headEnd type="none" w="med" len="med"/>
+                      <a:tailEnd type="none" w="med" len="med"/>
+                    </a:lnR>
+                    <a:lnT w="9525" cap="flat" cmpd="sng" algn="ctr">
+                      <a:solidFill>
+                        <a:schemeClr val="bg1"/>
+                      </a:solidFill>
+                      <a:prstDash val="solid"/>
+                      <a:round/>
+                      <a:headEnd type="none" w="med" len="med"/>
+                      <a:tailEnd type="none" w="med" len="med"/>
+                    </a:lnT>
+                    <a:lnB w="9525" cap="flat" cmpd="sng" algn="ctr">
+                      <a:solidFill>
+                        <a:schemeClr val="bg1"/>
+                      </a:solidFill>
+                      <a:prstDash val="solid"/>
+                      <a:round/>
+                      <a:headEnd type="none" w="med" len="med"/>
+                      <a:tailEnd type="none" w="med" len="med"/>
+                    </a:lnB>
+                    <a:lnTlToBr w="12700" cmpd="sng">
+                      <a:noFill/>
+                      <a:prstDash val="solid"/>
+                    </a:lnTlToBr>
+                    <a:lnBlToTr w="12700" cmpd="sng">
+                      <a:noFill/>
+                      <a:prstDash val="solid"/>
+                    </a:lnBlToTr>
+                  </a:tcPr>
+                </a:tc>
+                <a:tc>
+                  <a:txBody>
+                    <a:bodyPr/>
+                    <a:lstStyle/>
+                    <a:p>
+                      <a:pPr algn="ctr"/>
+                      <a:r>
+                        <a:rPr lang="en-US" sz="2000" dirty="0"/>
+                        <a:t>81</a:t>
+                      </a:r>
+                    </a:p>
+                  </a:txBody>
+                  <a:tcPr>
+                    <a:lnL w="9525" cap="flat" cmpd="sng" algn="ctr">
+                      <a:solidFill>
+                        <a:schemeClr val="bg1"/>
+                      </a:solidFill>
+                      <a:prstDash val="solid"/>
+                      <a:round/>
+                      <a:headEnd type="none" w="med" len="med"/>
+                      <a:tailEnd type="none" w="med" len="med"/>
+                    </a:lnL>
                     <a:lnR w="12700" cmpd="sng">
                       <a:noFill/>
                     </a:lnR>
@@ -18687,7 +18622,7 @@
                   </a:ext>
                 </a:extLst>
               </a:tr>
-              <a:tr h="370840">
+              <a:tr h="124089">
                 <a:tc>
                   <a:txBody>
                     <a:bodyPr/>
@@ -18695,7 +18630,7 @@
                     <a:p>
                       <a:r>
                         <a:rPr lang="en-US" sz="2000" dirty="0"/>
-                        <a:t>Male HR [95% CI]</a:t>
+                        <a:t>Male</a:t>
                       </a:r>
                     </a:p>
                   </a:txBody>
@@ -18743,6 +18678,59 @@
                       <a:r>
                         <a:rPr lang="en-US" sz="2000" dirty="0"/>
                         <a:t>1.101 [0.393, 3.087]</a:t>
+                      </a:r>
+                    </a:p>
+                  </a:txBody>
+                  <a:tcPr>
+                    <a:lnL w="9525" cap="flat" cmpd="sng" algn="ctr">
+                      <a:solidFill>
+                        <a:schemeClr val="bg1"/>
+                      </a:solidFill>
+                      <a:prstDash val="solid"/>
+                      <a:round/>
+                      <a:headEnd type="none" w="med" len="med"/>
+                      <a:tailEnd type="none" w="med" len="med"/>
+                    </a:lnL>
+                    <a:lnR w="9525" cap="flat" cmpd="sng" algn="ctr">
+                      <a:solidFill>
+                        <a:schemeClr val="bg1"/>
+                      </a:solidFill>
+                      <a:prstDash val="solid"/>
+                      <a:round/>
+                      <a:headEnd type="none" w="med" len="med"/>
+                      <a:tailEnd type="none" w="med" len="med"/>
+                    </a:lnR>
+                    <a:lnT w="9525" cap="flat" cmpd="sng" algn="ctr">
+                      <a:solidFill>
+                        <a:schemeClr val="bg1"/>
+                      </a:solidFill>
+                      <a:prstDash val="solid"/>
+                      <a:round/>
+                      <a:headEnd type="none" w="med" len="med"/>
+                      <a:tailEnd type="none" w="med" len="med"/>
+                    </a:lnT>
+                    <a:lnB w="12700" cmpd="sng">
+                      <a:noFill/>
+                    </a:lnB>
+                    <a:lnTlToBr w="12700" cmpd="sng">
+                      <a:noFill/>
+                      <a:prstDash val="solid"/>
+                    </a:lnTlToBr>
+                    <a:lnBlToTr w="12700" cmpd="sng">
+                      <a:noFill/>
+                      <a:prstDash val="solid"/>
+                    </a:lnBlToTr>
+                  </a:tcPr>
+                </a:tc>
+                <a:tc>
+                  <a:txBody>
+                    <a:bodyPr/>
+                    <a:lstStyle/>
+                    <a:p>
+                      <a:pPr algn="ctr"/>
+                      <a:r>
+                        <a:rPr lang="en-US" sz="2000" dirty="0"/>
+                        <a:t>15</a:t>
                       </a:r>
                     </a:p>
                   </a:txBody>
@@ -18822,6 +18810,272 @@
               <a:t>8</a:t>
             </a:fld>
             <a:endParaRPr lang="en-US" dirty="0"/>
+          </a:p>
+        </p:txBody>
+      </p:sp>
+      <p:graphicFrame>
+        <p:nvGraphicFramePr>
+          <p:cNvPr id="6" name="Table 5">
+            <a:extLst>
+              <a:ext uri="{FF2B5EF4-FFF2-40B4-BE49-F238E27FC236}">
+                <a16:creationId xmlns:a16="http://schemas.microsoft.com/office/drawing/2014/main" id="{37F386A9-45E9-7054-42B6-F46947705FAA}"/>
+              </a:ext>
+            </a:extLst>
+          </p:cNvPr>
+          <p:cNvGraphicFramePr>
+            <a:graphicFrameLocks noGrp="1"/>
+          </p:cNvGraphicFramePr>
+          <p:nvPr>
+            <p:extLst>
+              <p:ext uri="{D42A27DB-BD31-4B8C-83A1-F6EECF244321}">
+                <p14:modId xmlns:p14="http://schemas.microsoft.com/office/powerpoint/2010/main" val="3983262308"/>
+              </p:ext>
+            </p:extLst>
+          </p:nvPr>
+        </p:nvGraphicFramePr>
+        <p:xfrm>
+          <a:off x="509150" y="1811001"/>
+          <a:ext cx="5282050" cy="792480"/>
+        </p:xfrm>
+        <a:graphic>
+          <a:graphicData uri="http://schemas.openxmlformats.org/drawingml/2006/table">
+            <a:tbl>
+              <a:tblPr bandRow="1">
+                <a:tableStyleId>{5C22544A-7EE6-4342-B048-85BDC9FD1C3A}</a:tableStyleId>
+              </a:tblPr>
+              <a:tblGrid>
+                <a:gridCol w="2665850">
+                  <a:extLst>
+                    <a:ext uri="{9D8B030D-6E8A-4147-A177-3AD203B41FA5}">
+                      <a16:colId xmlns:a16="http://schemas.microsoft.com/office/drawing/2014/main" val="1237602297"/>
+                    </a:ext>
+                  </a:extLst>
+                </a:gridCol>
+                <a:gridCol w="2616200">
+                  <a:extLst>
+                    <a:ext uri="{9D8B030D-6E8A-4147-A177-3AD203B41FA5}">
+                      <a16:colId xmlns:a16="http://schemas.microsoft.com/office/drawing/2014/main" val="1360377934"/>
+                    </a:ext>
+                  </a:extLst>
+                </a:gridCol>
+              </a:tblGrid>
+              <a:tr h="370840">
+                <a:tc gridSpan="2">
+                  <a:txBody>
+                    <a:bodyPr/>
+                    <a:lstStyle/>
+                    <a:p>
+                      <a:pPr algn="ctr"/>
+                      <a:r>
+                        <a:rPr lang="en-US" sz="2000" b="1" dirty="0">
+                          <a:solidFill>
+                            <a:schemeClr val="bg1"/>
+                          </a:solidFill>
+                        </a:rPr>
+                        <a:t>LR Test Results</a:t>
+                      </a:r>
+                    </a:p>
+                  </a:txBody>
+                  <a:tcPr>
+                    <a:lnL w="12700" cmpd="sng">
+                      <a:noFill/>
+                    </a:lnL>
+                    <a:lnR w="12700" cmpd="sng">
+                      <a:noFill/>
+                    </a:lnR>
+                    <a:lnT w="12700" cmpd="sng">
+                      <a:noFill/>
+                    </a:lnT>
+                    <a:lnB w="9525" cap="flat" cmpd="sng" algn="ctr">
+                      <a:solidFill>
+                        <a:schemeClr val="bg1"/>
+                      </a:solidFill>
+                      <a:prstDash val="solid"/>
+                      <a:round/>
+                      <a:headEnd type="none" w="med" len="med"/>
+                      <a:tailEnd type="none" w="med" len="med"/>
+                    </a:lnB>
+                    <a:lnTlToBr w="12700" cmpd="sng">
+                      <a:noFill/>
+                      <a:prstDash val="solid"/>
+                    </a:lnTlToBr>
+                    <a:lnBlToTr w="12700" cmpd="sng">
+                      <a:noFill/>
+                      <a:prstDash val="solid"/>
+                    </a:lnBlToTr>
+                    <a:solidFill>
+                      <a:schemeClr val="accent1">
+                        <a:lumMod val="75000"/>
+                      </a:schemeClr>
+                    </a:solidFill>
+                  </a:tcPr>
+                </a:tc>
+                <a:tc hMerge="1">
+                  <a:txBody>
+                    <a:bodyPr/>
+                    <a:lstStyle/>
+                    <a:p>
+                      <a:endParaRPr lang="en-US" dirty="0"/>
+                    </a:p>
+                  </a:txBody>
+                  <a:tcPr/>
+                </a:tc>
+                <a:extLst>
+                  <a:ext uri="{0D108BD9-81ED-4DB2-BD59-A6C34878D82A}">
+                    <a16:rowId xmlns:a16="http://schemas.microsoft.com/office/drawing/2014/main" val="1197279698"/>
+                  </a:ext>
+                </a:extLst>
+              </a:tr>
+              <a:tr h="370840">
+                <a:tc>
+                  <a:txBody>
+                    <a:bodyPr/>
+                    <a:lstStyle/>
+                    <a:p>
+                      <a:r>
+                        <a:rPr lang="en-US" sz="2000" dirty="0"/>
+                        <a:t>p-value</a:t>
+                      </a:r>
+                    </a:p>
+                  </a:txBody>
+                  <a:tcPr>
+                    <a:lnL w="12700" cmpd="sng">
+                      <a:noFill/>
+                    </a:lnL>
+                    <a:lnR w="9525" cap="flat" cmpd="sng" algn="ctr">
+                      <a:solidFill>
+                        <a:schemeClr val="bg1"/>
+                      </a:solidFill>
+                      <a:prstDash val="solid"/>
+                      <a:round/>
+                      <a:headEnd type="none" w="med" len="med"/>
+                      <a:tailEnd type="none" w="med" len="med"/>
+                    </a:lnR>
+                    <a:lnT w="9525" cap="flat" cmpd="sng" algn="ctr">
+                      <a:solidFill>
+                        <a:schemeClr val="bg1"/>
+                      </a:solidFill>
+                      <a:prstDash val="solid"/>
+                      <a:round/>
+                      <a:headEnd type="none" w="med" len="med"/>
+                      <a:tailEnd type="none" w="med" len="med"/>
+                    </a:lnT>
+                    <a:lnB w="9525" cap="flat" cmpd="sng" algn="ctr">
+                      <a:solidFill>
+                        <a:schemeClr val="bg1"/>
+                      </a:solidFill>
+                      <a:prstDash val="solid"/>
+                      <a:round/>
+                      <a:headEnd type="none" w="med" len="med"/>
+                      <a:tailEnd type="none" w="med" len="med"/>
+                    </a:lnB>
+                    <a:lnTlToBr w="12700" cmpd="sng">
+                      <a:noFill/>
+                      <a:prstDash val="solid"/>
+                    </a:lnTlToBr>
+                    <a:lnBlToTr w="12700" cmpd="sng">
+                      <a:noFill/>
+                      <a:prstDash val="solid"/>
+                    </a:lnBlToTr>
+                  </a:tcPr>
+                </a:tc>
+                <a:tc>
+                  <a:txBody>
+                    <a:bodyPr/>
+                    <a:lstStyle/>
+                    <a:p>
+                      <a:pPr algn="ctr"/>
+                      <a:r>
+                        <a:rPr lang="en-US" sz="2000" dirty="0"/>
+                        <a:t>0.2187</a:t>
+                      </a:r>
+                    </a:p>
+                  </a:txBody>
+                  <a:tcPr>
+                    <a:lnL w="9525" cap="flat" cmpd="sng" algn="ctr">
+                      <a:solidFill>
+                        <a:schemeClr val="bg1"/>
+                      </a:solidFill>
+                      <a:prstDash val="solid"/>
+                      <a:round/>
+                      <a:headEnd type="none" w="med" len="med"/>
+                      <a:tailEnd type="none" w="med" len="med"/>
+                    </a:lnL>
+                    <a:lnR w="12700" cmpd="sng">
+                      <a:noFill/>
+                    </a:lnR>
+                    <a:lnT w="9525" cap="flat" cmpd="sng" algn="ctr">
+                      <a:solidFill>
+                        <a:schemeClr val="bg1"/>
+                      </a:solidFill>
+                      <a:prstDash val="solid"/>
+                      <a:round/>
+                      <a:headEnd type="none" w="med" len="med"/>
+                      <a:tailEnd type="none" w="med" len="med"/>
+                    </a:lnT>
+                    <a:lnB w="9525" cap="flat" cmpd="sng" algn="ctr">
+                      <a:solidFill>
+                        <a:schemeClr val="bg1"/>
+                      </a:solidFill>
+                      <a:prstDash val="solid"/>
+                      <a:round/>
+                      <a:headEnd type="none" w="med" len="med"/>
+                      <a:tailEnd type="none" w="med" len="med"/>
+                    </a:lnB>
+                    <a:lnTlToBr w="12700" cmpd="sng">
+                      <a:noFill/>
+                      <a:prstDash val="solid"/>
+                    </a:lnTlToBr>
+                    <a:lnBlToTr w="12700" cmpd="sng">
+                      <a:noFill/>
+                      <a:prstDash val="solid"/>
+                    </a:lnBlToTr>
+                  </a:tcPr>
+                </a:tc>
+                <a:extLst>
+                  <a:ext uri="{0D108BD9-81ED-4DB2-BD59-A6C34878D82A}">
+                    <a16:rowId xmlns:a16="http://schemas.microsoft.com/office/drawing/2014/main" val="609812023"/>
+                  </a:ext>
+                </a:extLst>
+              </a:tr>
+            </a:tbl>
+          </a:graphicData>
+        </a:graphic>
+      </p:graphicFrame>
+      <p:sp>
+        <p:nvSpPr>
+          <p:cNvPr id="10" name="TextBox 9">
+            <a:extLst>
+              <a:ext uri="{FF2B5EF4-FFF2-40B4-BE49-F238E27FC236}">
+                <a16:creationId xmlns:a16="http://schemas.microsoft.com/office/drawing/2014/main" id="{811CBC88-DF54-4884-E88D-A62EA43FD618}"/>
+              </a:ext>
+            </a:extLst>
+          </p:cNvPr>
+          <p:cNvSpPr txBox="1"/>
+          <p:nvPr/>
+        </p:nvSpPr>
+        <p:spPr>
+          <a:xfrm>
+            <a:off x="1275469" y="5784799"/>
+            <a:ext cx="9641059" cy="707886"/>
+          </a:xfrm>
+          <a:prstGeom prst="rect">
+            <a:avLst/>
+          </a:prstGeom>
+          <a:solidFill>
+            <a:schemeClr val="bg2"/>
+          </a:solidFill>
+        </p:spPr>
+        <p:txBody>
+          <a:bodyPr wrap="square" rtlCol="0">
+            <a:spAutoFit/>
+          </a:bodyPr>
+          <a:lstStyle/>
+          <a:p>
+            <a:r>
+              <a:rPr lang="en-US" sz="2000" dirty="0"/>
+              <a:t>Since only 15 events occurred in the Male subgroup statistical tests are underpowered and treatment effect estimates are likely imprecise and unstable.</a:t>
+            </a:r>
           </a:p>
         </p:txBody>
       </p:sp>
@@ -18915,7 +19169,7 @@
         <p:spPr>
           <a:xfrm>
             <a:off x="6933399" y="2103737"/>
-            <a:ext cx="4799798" cy="3169919"/>
+            <a:ext cx="4799798" cy="3757488"/>
           </a:xfrm>
           <a:solidFill>
             <a:schemeClr val="bg2"/>
@@ -18931,38 +19185,35 @@
               <a:buNone/>
             </a:pPr>
             <a:r>
-              <a:rPr lang="en-US" sz="2000" b="1" dirty="0"/>
+              <a:rPr lang="en-US" sz="2400" b="1" dirty="0"/>
               <a:t>Interpretation</a:t>
             </a:r>
           </a:p>
           <a:p>
             <a:r>
-              <a:rPr lang="en-US" sz="2000" dirty="0"/>
-              <a:t>Marginal significant at </a:t>
-            </a:r>
-            <a:r>
-              <a:rPr lang="el-GR" sz="2000" dirty="0"/>
+              <a:rPr lang="en-US" sz="2400" dirty="0"/>
+              <a:t>Marginal significance at </a:t>
+            </a:r>
+            <a:r>
+              <a:rPr lang="el-GR" sz="2400" dirty="0"/>
               <a:t>α</a:t>
             </a:r>
             <a:r>
-              <a:rPr lang="en-US" sz="2000" dirty="0"/>
+              <a:rPr lang="en-US" sz="2400" dirty="0"/>
               <a:t> = 0.10</a:t>
             </a:r>
           </a:p>
           <a:p>
             <a:r>
-              <a:rPr lang="en-US" sz="2000" dirty="0"/>
-              <a:t>Only Asian/PI subgroup interaction term is significant but high HR = 15.514 and large CI bounds suggest this is an unstable result</a:t>
-            </a:r>
-          </a:p>
-          <a:p>
-            <a:r>
-              <a:rPr lang="en-US" sz="2000" dirty="0"/>
-              <a:t>Removal would increase p-value</a:t>
-            </a:r>
-          </a:p>
-          <a:p>
-            <a:endParaRPr lang="en-US" sz="2000" dirty="0"/>
+              <a:rPr lang="en-US" sz="2400" dirty="0"/>
+              <a:t>Only Asian/PI interaction term (HR = 15.54) was significant but result unstable due to low event count</a:t>
+            </a:r>
+          </a:p>
+          <a:p>
+            <a:r>
+              <a:rPr lang="en-US" sz="2400" dirty="0"/>
+              <a:t>All groups underpowered according to Cox events-per-variable rule (EPV)</a:t>
+            </a:r>
           </a:p>
         </p:txBody>
       </p:sp>
@@ -20292,14 +20543,14 @@
           <p:nvPr>
             <p:extLst>
               <p:ext uri="{D42A27DB-BD31-4B8C-83A1-F6EECF244321}">
-                <p14:modId xmlns:p14="http://schemas.microsoft.com/office/powerpoint/2010/main" val="796884917"/>
+                <p14:modId xmlns:p14="http://schemas.microsoft.com/office/powerpoint/2010/main" val="3480498022"/>
               </p:ext>
             </p:extLst>
           </p:nvPr>
         </p:nvGraphicFramePr>
         <p:xfrm>
           <a:off x="714619" y="2103738"/>
-          <a:ext cx="5810570" cy="3169920"/>
+          <a:ext cx="5810570" cy="792480"/>
         </p:xfrm>
         <a:graphic>
           <a:graphicData uri="http://schemas.openxmlformats.org/drawingml/2006/table">
@@ -20308,30 +20559,23 @@
                 <a:tableStyleId>{5C22544A-7EE6-4342-B048-85BDC9FD1C3A}</a:tableStyleId>
               </a:tblPr>
               <a:tblGrid>
-                <a:gridCol w="1704976">
+                <a:gridCol w="4047881">
                   <a:extLst>
                     <a:ext uri="{9D8B030D-6E8A-4147-A177-3AD203B41FA5}">
                       <a16:colId xmlns:a16="http://schemas.microsoft.com/office/drawing/2014/main" val="1779458928"/>
                     </a:ext>
                   </a:extLst>
                 </a:gridCol>
-                <a:gridCol w="2400618">
+                <a:gridCol w="1762689">
                   <a:extLst>
                     <a:ext uri="{9D8B030D-6E8A-4147-A177-3AD203B41FA5}">
                       <a16:colId xmlns:a16="http://schemas.microsoft.com/office/drawing/2014/main" val="2869337161"/>
                     </a:ext>
                   </a:extLst>
                 </a:gridCol>
-                <a:gridCol w="1704976">
-                  <a:extLst>
-                    <a:ext uri="{9D8B030D-6E8A-4147-A177-3AD203B41FA5}">
-                      <a16:colId xmlns:a16="http://schemas.microsoft.com/office/drawing/2014/main" val="4102276423"/>
-                    </a:ext>
-                  </a:extLst>
-                </a:gridCol>
               </a:tblGrid>
               <a:tr h="370840">
-                <a:tc gridSpan="3">
+                <a:tc gridSpan="2">
                   <a:txBody>
                     <a:bodyPr/>
                     <a:lstStyle/>
@@ -20343,7 +20587,7 @@
                             <a:schemeClr val="bg1"/>
                           </a:solidFill>
                         </a:rPr>
-                        <a:t>Race/Ethnicity Interaction Model</a:t>
+                        <a:t>LR Test Results</a:t>
                       </a:r>
                     </a:p>
                   </a:txBody>
@@ -20365,16 +20609,6 @@
                   </a:txBody>
                   <a:tcPr/>
                 </a:tc>
-                <a:tc hMerge="1">
-                  <a:txBody>
-                    <a:bodyPr/>
-                    <a:lstStyle/>
-                    <a:p>
-                      <a:endParaRPr lang="en-US"/>
-                    </a:p>
-                  </a:txBody>
-                  <a:tcPr/>
-                </a:tc>
                 <a:extLst>
                   <a:ext uri="{0D108BD9-81ED-4DB2-BD59-A6C34878D82A}">
                     <a16:rowId xmlns:a16="http://schemas.microsoft.com/office/drawing/2014/main" val="1397225430"/>
@@ -20389,13 +20623,13 @@
                     <a:p>
                       <a:r>
                         <a:rPr lang="en-US" sz="2000" dirty="0"/>
-                        <a:t>LRT p-value</a:t>
+                        <a:t>p-value</a:t>
                       </a:r>
                     </a:p>
                   </a:txBody>
                   <a:tcPr/>
                 </a:tc>
-                <a:tc gridSpan="2">
+                <a:tc>
                   <a:txBody>
                     <a:bodyPr/>
                     <a:lstStyle/>
@@ -20409,19 +20643,189 @@
                   </a:txBody>
                   <a:tcPr/>
                 </a:tc>
+                <a:extLst>
+                  <a:ext uri="{0D108BD9-81ED-4DB2-BD59-A6C34878D82A}">
+                    <a16:rowId xmlns:a16="http://schemas.microsoft.com/office/drawing/2014/main" val="402482031"/>
+                  </a:ext>
+                </a:extLst>
+              </a:tr>
+            </a:tbl>
+          </a:graphicData>
+        </a:graphic>
+      </p:graphicFrame>
+      <p:sp>
+        <p:nvSpPr>
+          <p:cNvPr id="6" name="Slide Number Placeholder 5">
+            <a:extLst>
+              <a:ext uri="{FF2B5EF4-FFF2-40B4-BE49-F238E27FC236}">
+                <a16:creationId xmlns:a16="http://schemas.microsoft.com/office/drawing/2014/main" id="{18071FD4-7731-0AFB-4EFD-595B31DC42B3}"/>
+              </a:ext>
+            </a:extLst>
+          </p:cNvPr>
+          <p:cNvSpPr>
+            <a:spLocks noGrp="1"/>
+          </p:cNvSpPr>
+          <p:nvPr>
+            <p:ph type="sldNum" sz="quarter" idx="12"/>
+          </p:nvPr>
+        </p:nvSpPr>
+        <p:spPr>
+          <a:xfrm>
+            <a:off x="8597900" y="6319253"/>
+            <a:ext cx="2743200" cy="365125"/>
+          </a:xfrm>
+        </p:spPr>
+        <p:txBody>
+          <a:bodyPr/>
+          <a:lstStyle/>
+          <a:p>
+            <a:fld id="{EE78427E-3D83-4E05-BBD0-5A5577BF92C2}" type="slidenum">
+              <a:rPr lang="en-US" smtClean="0"/>
+              <a:t>9</a:t>
+            </a:fld>
+            <a:endParaRPr lang="en-US" dirty="0"/>
+          </a:p>
+        </p:txBody>
+      </p:sp>
+      <p:graphicFrame>
+        <p:nvGraphicFramePr>
+          <p:cNvPr id="4" name="Table 3">
+            <a:extLst>
+              <a:ext uri="{FF2B5EF4-FFF2-40B4-BE49-F238E27FC236}">
+                <a16:creationId xmlns:a16="http://schemas.microsoft.com/office/drawing/2014/main" id="{F02A1F16-2B0A-AFBB-04AE-C897B62E1140}"/>
+              </a:ext>
+            </a:extLst>
+          </p:cNvPr>
+          <p:cNvGraphicFramePr>
+            <a:graphicFrameLocks noGrp="1"/>
+          </p:cNvGraphicFramePr>
+          <p:nvPr>
+            <p:extLst>
+              <p:ext uri="{D42A27DB-BD31-4B8C-83A1-F6EECF244321}">
+                <p14:modId xmlns:p14="http://schemas.microsoft.com/office/powerpoint/2010/main" val="2615394557"/>
+              </p:ext>
+            </p:extLst>
+          </p:nvPr>
+        </p:nvGraphicFramePr>
+        <p:xfrm>
+          <a:off x="695325" y="3087545"/>
+          <a:ext cx="5810570" cy="2773680"/>
+        </p:xfrm>
+        <a:graphic>
+          <a:graphicData uri="http://schemas.openxmlformats.org/drawingml/2006/table">
+            <a:tbl>
+              <a:tblPr bandRow="1">
+                <a:tableStyleId>{5C22544A-7EE6-4342-B048-85BDC9FD1C3A}</a:tableStyleId>
+              </a:tblPr>
+              <a:tblGrid>
+                <a:gridCol w="1704976">
+                  <a:extLst>
+                    <a:ext uri="{9D8B030D-6E8A-4147-A177-3AD203B41FA5}">
+                      <a16:colId xmlns:a16="http://schemas.microsoft.com/office/drawing/2014/main" val="753851223"/>
+                    </a:ext>
+                  </a:extLst>
+                </a:gridCol>
+                <a:gridCol w="2400618">
+                  <a:extLst>
+                    <a:ext uri="{9D8B030D-6E8A-4147-A177-3AD203B41FA5}">
+                      <a16:colId xmlns:a16="http://schemas.microsoft.com/office/drawing/2014/main" val="2687131599"/>
+                    </a:ext>
+                  </a:extLst>
+                </a:gridCol>
+                <a:gridCol w="1704976">
+                  <a:extLst>
+                    <a:ext uri="{9D8B030D-6E8A-4147-A177-3AD203B41FA5}">
+                      <a16:colId xmlns:a16="http://schemas.microsoft.com/office/drawing/2014/main" val="2384168081"/>
+                    </a:ext>
+                  </a:extLst>
+                </a:gridCol>
+              </a:tblGrid>
+              <a:tr h="370840">
+                <a:tc gridSpan="3">
+                  <a:txBody>
+                    <a:bodyPr/>
+                    <a:lstStyle/>
+                    <a:p>
+                      <a:pPr marL="0" marR="0" lvl="0" indent="0" algn="ctr" defTabSz="914400" rtl="0" eaLnBrk="1" fontAlgn="auto" latinLnBrk="0" hangingPunct="1">
+                        <a:lnSpc>
+                          <a:spcPct val="100000"/>
+                        </a:lnSpc>
+                        <a:spcBef>
+                          <a:spcPts val="0"/>
+                        </a:spcBef>
+                        <a:spcAft>
+                          <a:spcPts val="0"/>
+                        </a:spcAft>
+                        <a:buClrTx/>
+                        <a:buSzTx/>
+                        <a:buFontTx/>
+                        <a:buNone/>
+                        <a:tabLst/>
+                        <a:defRPr/>
+                      </a:pPr>
+                      <a:r>
+                        <a:rPr lang="en-US" sz="2000" b="1" dirty="0">
+                          <a:solidFill>
+                            <a:schemeClr val="bg1"/>
+                          </a:solidFill>
+                        </a:rPr>
+                        <a:t>Treatment/Control HR Estimates</a:t>
+                      </a:r>
+                    </a:p>
+                  </a:txBody>
+                  <a:tcPr>
+                    <a:solidFill>
+                      <a:schemeClr val="accent1">
+                        <a:lumMod val="75000"/>
+                      </a:schemeClr>
+                    </a:solidFill>
+                  </a:tcPr>
+                </a:tc>
                 <a:tc hMerge="1">
                   <a:txBody>
                     <a:bodyPr/>
                     <a:lstStyle/>
                     <a:p>
-                      <a:endParaRPr lang="en-US"/>
+                      <a:pPr algn="ctr"/>
+                      <a:endParaRPr lang="en-US" sz="2000" b="1" dirty="0">
+                        <a:solidFill>
+                          <a:schemeClr val="bg1"/>
+                        </a:solidFill>
+                      </a:endParaRPr>
                     </a:p>
                   </a:txBody>
-                  <a:tcPr/>
+                  <a:tcPr>
+                    <a:solidFill>
+                      <a:schemeClr val="accent1">
+                        <a:lumMod val="75000"/>
+                      </a:schemeClr>
+                    </a:solidFill>
+                  </a:tcPr>
+                </a:tc>
+                <a:tc hMerge="1">
+                  <a:txBody>
+                    <a:bodyPr/>
+                    <a:lstStyle/>
+                    <a:p>
+                      <a:pPr algn="ctr"/>
+                      <a:endParaRPr lang="en-US" sz="2000" b="1" dirty="0">
+                        <a:solidFill>
+                          <a:schemeClr val="bg1"/>
+                        </a:solidFill>
+                      </a:endParaRPr>
+                    </a:p>
+                  </a:txBody>
+                  <a:tcPr>
+                    <a:solidFill>
+                      <a:schemeClr val="accent1">
+                        <a:lumMod val="75000"/>
+                      </a:schemeClr>
+                    </a:solidFill>
+                  </a:tcPr>
                 </a:tc>
                 <a:extLst>
                   <a:ext uri="{0D108BD9-81ED-4DB2-BD59-A6C34878D82A}">
-                    <a16:rowId xmlns:a16="http://schemas.microsoft.com/office/drawing/2014/main" val="402482031"/>
+                    <a16:rowId xmlns:a16="http://schemas.microsoft.com/office/drawing/2014/main" val="3367139252"/>
                   </a:ext>
                 </a:extLst>
               </a:tr>
@@ -20499,7 +20903,7 @@
                 </a:tc>
                 <a:extLst>
                   <a:ext uri="{0D108BD9-81ED-4DB2-BD59-A6C34878D82A}">
-                    <a16:rowId xmlns:a16="http://schemas.microsoft.com/office/drawing/2014/main" val="292657601"/>
+                    <a16:rowId xmlns:a16="http://schemas.microsoft.com/office/drawing/2014/main" val="3183919892"/>
                   </a:ext>
                 </a:extLst>
               </a:tr>
@@ -20547,7 +20951,7 @@
                 </a:tc>
                 <a:extLst>
                   <a:ext uri="{0D108BD9-81ED-4DB2-BD59-A6C34878D82A}">
-                    <a16:rowId xmlns:a16="http://schemas.microsoft.com/office/drawing/2014/main" val="4202147545"/>
+                    <a16:rowId xmlns:a16="http://schemas.microsoft.com/office/drawing/2014/main" val="4212964815"/>
                   </a:ext>
                 </a:extLst>
               </a:tr>
@@ -20595,7 +20999,7 @@
                 </a:tc>
                 <a:extLst>
                   <a:ext uri="{0D108BD9-81ED-4DB2-BD59-A6C34878D82A}">
-                    <a16:rowId xmlns:a16="http://schemas.microsoft.com/office/drawing/2014/main" val="3499168990"/>
+                    <a16:rowId xmlns:a16="http://schemas.microsoft.com/office/drawing/2014/main" val="3932577804"/>
                   </a:ext>
                 </a:extLst>
               </a:tr>
@@ -20643,7 +21047,7 @@
                 </a:tc>
                 <a:extLst>
                   <a:ext uri="{0D108BD9-81ED-4DB2-BD59-A6C34878D82A}">
-                    <a16:rowId xmlns:a16="http://schemas.microsoft.com/office/drawing/2014/main" val="2481086426"/>
+                    <a16:rowId xmlns:a16="http://schemas.microsoft.com/office/drawing/2014/main" val="2130899801"/>
                   </a:ext>
                 </a:extLst>
               </a:tr>
@@ -20691,7 +21095,7 @@
                 </a:tc>
                 <a:extLst>
                   <a:ext uri="{0D108BD9-81ED-4DB2-BD59-A6C34878D82A}">
-                    <a16:rowId xmlns:a16="http://schemas.microsoft.com/office/drawing/2014/main" val="2034761336"/>
+                    <a16:rowId xmlns:a16="http://schemas.microsoft.com/office/drawing/2014/main" val="1823420556"/>
                   </a:ext>
                 </a:extLst>
               </a:tr>
@@ -20739,7 +21143,7 @@
                 </a:tc>
                 <a:extLst>
                   <a:ext uri="{0D108BD9-81ED-4DB2-BD59-A6C34878D82A}">
-                    <a16:rowId xmlns:a16="http://schemas.microsoft.com/office/drawing/2014/main" val="654242305"/>
+                    <a16:rowId xmlns:a16="http://schemas.microsoft.com/office/drawing/2014/main" val="3560538439"/>
                   </a:ext>
                 </a:extLst>
               </a:tr>
@@ -20747,40 +21151,6 @@
           </a:graphicData>
         </a:graphic>
       </p:graphicFrame>
-      <p:sp>
-        <p:nvSpPr>
-          <p:cNvPr id="6" name="Slide Number Placeholder 5">
-            <a:extLst>
-              <a:ext uri="{FF2B5EF4-FFF2-40B4-BE49-F238E27FC236}">
-                <a16:creationId xmlns:a16="http://schemas.microsoft.com/office/drawing/2014/main" id="{18071FD4-7731-0AFB-4EFD-595B31DC42B3}"/>
-              </a:ext>
-            </a:extLst>
-          </p:cNvPr>
-          <p:cNvSpPr>
-            <a:spLocks noGrp="1"/>
-          </p:cNvSpPr>
-          <p:nvPr>
-            <p:ph type="sldNum" sz="quarter" idx="12"/>
-          </p:nvPr>
-        </p:nvSpPr>
-        <p:spPr>
-          <a:xfrm>
-            <a:off x="8610600" y="6378910"/>
-            <a:ext cx="2743200" cy="365125"/>
-          </a:xfrm>
-        </p:spPr>
-        <p:txBody>
-          <a:bodyPr/>
-          <a:lstStyle/>
-          <a:p>
-            <a:fld id="{EE78427E-3D83-4E05-BBD0-5A5577BF92C2}" type="slidenum">
-              <a:rPr lang="en-US" smtClean="0"/>
-              <a:t>9</a:t>
-            </a:fld>
-            <a:endParaRPr lang="en-US" dirty="0"/>
-          </a:p>
-        </p:txBody>
-      </p:sp>
     </p:spTree>
     <p:extLst>
       <p:ext uri="{BB962C8B-B14F-4D97-AF65-F5344CB8AC3E}">
